--- a/03-build/pptx/C6plus_U2_docente.pptx
+++ b/03-build/pptx/C6plus_U2_docente.pptx
@@ -6665,7 +6665,6 @@
               <a:srgbClr val="E4E3DE"/>
             </a:solidFill>
           </a:ln>
-          <a:effectLst/>
           <a:effectLst>
             <a:outerShdw blurRad="90000" dist="38000" dir="5400000" rotWithShape="0">
               <a:srgbClr val="20242E">
@@ -6899,7 +6898,6 @@
               <a:srgbClr val="E4E3DE"/>
             </a:solidFill>
           </a:ln>
-          <a:effectLst/>
           <a:effectLst>
             <a:outerShdw blurRad="90000" dist="38000" dir="5400000" rotWithShape="0">
               <a:srgbClr val="20242E">
@@ -7133,7 +7131,6 @@
               <a:srgbClr val="E4E3DE"/>
             </a:solidFill>
           </a:ln>
-          <a:effectLst/>
           <a:effectLst>
             <a:outerShdw blurRad="90000" dist="38000" dir="5400000" rotWithShape="0">
               <a:srgbClr val="20242E">
@@ -7367,7 +7364,6 @@
               <a:srgbClr val="E4E3DE"/>
             </a:solidFill>
           </a:ln>
-          <a:effectLst/>
           <a:effectLst>
             <a:outerShdw blurRad="90000" dist="38000" dir="5400000" rotWithShape="0">
               <a:srgbClr val="20242E">
@@ -9346,7 +9342,6 @@
           <a:ln>
             <a:noFill/>
           </a:ln>
-          <a:effectLst/>
           <a:effectLst>
             <a:outerShdw blurRad="90000" dist="38000" dir="5400000" rotWithShape="0">
               <a:srgbClr val="20242E">
@@ -9480,7 +9475,6 @@
           <a:ln>
             <a:noFill/>
           </a:ln>
-          <a:effectLst/>
           <a:effectLst>
             <a:outerShdw blurRad="90000" dist="38000" dir="5400000" rotWithShape="0">
               <a:srgbClr val="20242E">
@@ -15390,7 +15384,6 @@
               <a:srgbClr val="E4E3DE"/>
             </a:solidFill>
           </a:ln>
-          <a:effectLst/>
           <a:effectLst>
             <a:outerShdw blurRad="90000" dist="38000" dir="5400000" rotWithShape="0">
               <a:srgbClr val="20242E">
@@ -16069,7 +16062,6 @@
               <a:srgbClr val="7C56A9"/>
             </a:solidFill>
           </a:ln>
-          <a:effectLst/>
           <a:effectLst>
             <a:outerShdw blurRad="90000" dist="38000" dir="5400000" rotWithShape="0">
               <a:srgbClr val="20242E">
@@ -22987,7 +22979,6 @@
               <a:srgbClr val="7C56A9"/>
             </a:solidFill>
           </a:ln>
-          <a:effectLst/>
           <a:effectLst>
             <a:outerShdw blurRad="90000" dist="38000" dir="5400000" rotWithShape="0">
               <a:srgbClr val="20242E">
@@ -23221,7 +23212,6 @@
               <a:srgbClr val="7C56A9"/>
             </a:solidFill>
           </a:ln>
-          <a:effectLst/>
           <a:effectLst>
             <a:outerShdw blurRad="90000" dist="38000" dir="5400000" rotWithShape="0">
               <a:srgbClr val="20242E">
@@ -23455,7 +23445,6 @@
               <a:srgbClr val="7C56A9"/>
             </a:solidFill>
           </a:ln>
-          <a:effectLst/>
           <a:effectLst>
             <a:outerShdw blurRad="90000" dist="38000" dir="5400000" rotWithShape="0">
               <a:srgbClr val="20242E">
@@ -28833,7 +28822,6 @@
               <a:srgbClr val="7C56A9"/>
             </a:solidFill>
           </a:ln>
-          <a:effectLst/>
           <a:effectLst>
             <a:outerShdw blurRad="90000" dist="38000" dir="5400000" rotWithShape="0">
               <a:srgbClr val="20242E">
@@ -29136,7 +29124,6 @@
               <a:srgbClr val="7C56A9"/>
             </a:solidFill>
           </a:ln>
-          <a:effectLst/>
           <a:effectLst>
             <a:outerShdw blurRad="90000" dist="38000" dir="5400000" rotWithShape="0">
               <a:srgbClr val="20242E">
@@ -29439,7 +29426,6 @@
               <a:srgbClr val="7C56A9"/>
             </a:solidFill>
           </a:ln>
-          <a:effectLst/>
           <a:effectLst>
             <a:outerShdw blurRad="90000" dist="38000" dir="5400000" rotWithShape="0">
               <a:srgbClr val="20242E">
@@ -29742,7 +29728,6 @@
               <a:srgbClr val="7C56A9"/>
             </a:solidFill>
           </a:ln>
-          <a:effectLst/>
           <a:effectLst>
             <a:outerShdw blurRad="90000" dist="38000" dir="5400000" rotWithShape="0">
               <a:srgbClr val="20242E">
@@ -30045,7 +30030,6 @@
               <a:srgbClr val="7C56A9"/>
             </a:solidFill>
           </a:ln>
-          <a:effectLst/>
           <a:effectLst>
             <a:outerShdw blurRad="90000" dist="38000" dir="5400000" rotWithShape="0">
               <a:srgbClr val="20242E">
@@ -30348,7 +30332,6 @@
               <a:srgbClr val="5B3E83"/>
             </a:solidFill>
           </a:ln>
-          <a:effectLst/>
           <a:effectLst>
             <a:outerShdw blurRad="90000" dist="38000" dir="5400000" rotWithShape="0">
               <a:srgbClr val="20242E">
@@ -30651,7 +30634,6 @@
               <a:srgbClr val="5B3E83"/>
             </a:solidFill>
           </a:ln>
-          <a:effectLst/>
           <a:effectLst>
             <a:outerShdw blurRad="90000" dist="38000" dir="5400000" rotWithShape="0">
               <a:srgbClr val="20242E">
@@ -30954,7 +30936,6 @@
               <a:srgbClr val="5B3E83"/>
             </a:solidFill>
           </a:ln>
-          <a:effectLst/>
           <a:effectLst>
             <a:outerShdw blurRad="90000" dist="38000" dir="5400000" rotWithShape="0">
               <a:srgbClr val="20242E">
@@ -31781,7 +31762,6 @@
           <a:ln>
             <a:noFill/>
           </a:ln>
-          <a:effectLst/>
           <a:effectLst>
             <a:outerShdw blurRad="90000" dist="38000" dir="5400000" rotWithShape="0">
               <a:srgbClr val="20242E">
@@ -33494,7 +33474,6 @@
           <a:ln>
             <a:noFill/>
           </a:ln>
-          <a:effectLst/>
           <a:effectLst>
             <a:outerShdw blurRad="90000" dist="38000" dir="5400000" rotWithShape="0">
               <a:srgbClr val="20242E">
@@ -33637,7 +33616,6 @@
           <a:ln>
             <a:noFill/>
           </a:ln>
-          <a:effectLst/>
           <a:effectLst>
             <a:outerShdw blurRad="90000" dist="38000" dir="5400000" rotWithShape="0">
               <a:srgbClr val="20242E">
@@ -33780,7 +33758,6 @@
           <a:ln>
             <a:noFill/>
           </a:ln>
-          <a:effectLst/>
           <a:effectLst>
             <a:outerShdw blurRad="90000" dist="38000" dir="5400000" rotWithShape="0">
               <a:srgbClr val="20242E">
@@ -33923,7 +33900,6 @@
           <a:ln>
             <a:noFill/>
           </a:ln>
-          <a:effectLst/>
           <a:effectLst>
             <a:outerShdw blurRad="90000" dist="38000" dir="5400000" rotWithShape="0">
               <a:srgbClr val="20242E">
@@ -34066,7 +34042,6 @@
           <a:ln>
             <a:noFill/>
           </a:ln>
-          <a:effectLst/>
           <a:effectLst>
             <a:outerShdw blurRad="90000" dist="38000" dir="5400000" rotWithShape="0">
               <a:srgbClr val="20242E">
@@ -38290,7 +38265,6 @@
           <a:ln>
             <a:noFill/>
           </a:ln>
-          <a:effectLst/>
           <a:effectLst>
             <a:outerShdw blurRad="90000" dist="38000" dir="5400000" rotWithShape="0">
               <a:srgbClr val="20242E">
@@ -38415,7 +38389,6 @@
           <a:ln>
             <a:noFill/>
           </a:ln>
-          <a:effectLst/>
           <a:effectLst>
             <a:outerShdw blurRad="90000" dist="38000" dir="5400000" rotWithShape="0">
               <a:srgbClr val="20242E">
@@ -45603,7 +45576,6 @@
           <a:ln>
             <a:noFill/>
           </a:ln>
-          <a:effectLst/>
           <a:effectLst>
             <a:outerShdw blurRad="90000" dist="38000" dir="5400000" rotWithShape="0">
               <a:srgbClr val="20242E">
@@ -49405,7 +49377,6 @@
               <a:srgbClr val="7C56A9"/>
             </a:solidFill>
           </a:ln>
-          <a:effectLst/>
           <a:effectLst>
             <a:outerShdw blurRad="90000" dist="38000" dir="5400000" rotWithShape="0">
               <a:srgbClr val="20242E">

--- a/03-build/pptx/C6plus_U2_docente.pptx
+++ b/03-build/pptx/C6plus_U2_docente.pptx
@@ -11,6 +11,9 @@
     <p:sldId id="259" r:id="rId11"/>
     <p:sldId id="260" r:id="rId12"/>
     <p:sldId id="261" r:id="rId13"/>
+    <p:sldId id="277" r:id="rId29"/>
+    <p:sldId id="278" r:id="rId30"/>
+    <p:sldId id="279" r:id="rId31"/>
     <p:sldId id="262" r:id="rId14"/>
     <p:sldId id="263" r:id="rId15"/>
     <p:sldId id="264" r:id="rId16"/>
@@ -1556,6 +1559,255 @@
           </p:nvPr>
         </p:nvSpPr>
         <p:spPr/>
+      </p:sp>
+    </p:spTree>
+  </p:cSld>
+  <p:clrMapOvr>
+    <a:masterClrMapping/>
+  </p:clrMapOvr>
+</p:notes>
+</file>
+
+<file path=ppt/notesSlides/notesSlide22.xml><?xml version="1.0" encoding="utf-8"?>
+<p:notes xmlns:a="http://schemas.openxmlformats.org/drawingml/2006/main" xmlns:p="http://schemas.openxmlformats.org/presentationml/2006/main" xmlns:r="http://schemas.openxmlformats.org/officeDocument/2006/relationships">
+  <p:cSld>
+    <p:spTree>
+      <p:nvGrpSpPr>
+        <p:cNvPr id="1" name=""/>
+        <p:cNvGrpSpPr/>
+        <p:nvPr/>
+      </p:nvGrpSpPr>
+      <p:grpSpPr>
+        <a:xfrm>
+          <a:off x="0" y="0"/>
+          <a:ext cx="0" cy="0"/>
+          <a:chOff x="0" y="0"/>
+          <a:chExt cx="0" cy="0"/>
+        </a:xfrm>
+      </p:grpSpPr>
+      <p:sp>
+        <p:nvSpPr>
+          <p:cNvPr id="2" name="Slide Image Placeholder 1"/>
+          <p:cNvSpPr>
+            <a:spLocks noGrp="1"/>
+          </p:cNvSpPr>
+          <p:nvPr>
+            <p:ph type="sldImg" idx="2"/>
+          </p:nvPr>
+        </p:nvSpPr>
+        <p:spPr/>
+      </p:sp>
+      <p:sp>
+        <p:nvSpPr>
+          <p:cNvPr id="3" name="Notes Placeholder 2"/>
+          <p:cNvSpPr>
+            <a:spLocks noGrp="1"/>
+          </p:cNvSpPr>
+          <p:nvPr>
+            <p:ph type="body" idx="3" sz="quarter"/>
+          </p:nvPr>
+        </p:nvSpPr>
+        <p:spPr/>
+        <p:txBody>
+          <a:bodyPr/>
+          <a:lstStyle/>
+          <a:p>
+            <a:r>
+              <a:t>RETO 2 · Airbnb honesto — ✍️ creatieve beperking</a:t>
+            </a:r>
+          </a:p>
+          <a:p>
+            <a:r>
+              <a:t>OPDRACHT: Schrijf de advertentie met de zes gebreken erin, en zonder te liegen.</a:t>
+            </a:r>
+          </a:p>
+          <a:p>
+            <a:r>
+              <a:t>DE REGEL: Alle zes de gebreken staan erin, letterlijk. Je mag ze omkaderen maar niet weglaten, en je mag niets verzinnen dat er niet is.</a:t>
+            </a:r>
+          </a:p>
+          <a:p>
+            <a:r>
+              <a:t>VERLOOP: Leed el piso y sus seis defectos. | Buscad para cada defecto su lado bueno. | Escribid el anuncio: ocho frases. | La clase vota: ¿lo alquilan o no?</a:t>
+            </a:r>
+          </a:p>
+          <a:p>
+            <a:r>
+              <a:t>SLEUTEL: De opdracht traint precies wat het leerplan «functioneel taalgebruik» noemt: dezelfde waarheid anders kaderen zonder te liegen. «No hay ascensor» wordt «un cuarto piso sin ascensor: subes las escaleras y ya has hecho deporte».  ||  «Aunque» en «así que» zijn de twee conectoren die het werk doen. Wie er geen enkele gebruikt, heeft een lijst geschreven, geen advertentie.  ||  De stemming aan het eind is de toets: als niemand het zou huren, is het te eerlijk geworden; als iedereen het zou huren, is er iets weggemoffeld. Kijk na welk gebrek.</a:t>
+            </a:r>
+          </a:p>
+          <a:p>
+            <a:r>
+              <a:t>NOTA: Vergelijk met een echte advertentie op het scherm. De klas ziet meteen welke gebreken daar níet in staan — en dat is het beste gesprek van de les.</a:t>
+            </a:r>
+          </a:p>
+        </p:txBody>
+      </p:sp>
+    </p:spTree>
+  </p:cSld>
+  <p:clrMapOvr>
+    <a:masterClrMapping/>
+  </p:clrMapOvr>
+</p:notes>
+</file>
+
+<file path=ppt/notesSlides/notesSlide23.xml><?xml version="1.0" encoding="utf-8"?>
+<p:notes xmlns:a="http://schemas.openxmlformats.org/drawingml/2006/main" xmlns:p="http://schemas.openxmlformats.org/presentationml/2006/main" xmlns:r="http://schemas.openxmlformats.org/officeDocument/2006/relationships">
+  <p:cSld>
+    <p:spTree>
+      <p:nvGrpSpPr>
+        <p:cNvPr id="1" name=""/>
+        <p:cNvGrpSpPr/>
+        <p:nvPr/>
+      </p:nvGrpSpPr>
+      <p:grpSpPr>
+        <a:xfrm>
+          <a:off x="0" y="0"/>
+          <a:ext cx="0" cy="0"/>
+          <a:chOff x="0" y="0"/>
+          <a:chExt cx="0" cy="0"/>
+        </a:xfrm>
+      </p:grpSpPr>
+      <p:sp>
+        <p:nvSpPr>
+          <p:cNvPr id="2" name="Slide Image Placeholder 1"/>
+          <p:cNvSpPr>
+            <a:spLocks noGrp="1"/>
+          </p:cNvSpPr>
+          <p:nvPr>
+            <p:ph type="sldImg" idx="2"/>
+          </p:nvPr>
+        </p:nvSpPr>
+        <p:spPr/>
+      </p:sp>
+      <p:sp>
+        <p:nvSpPr>
+          <p:cNvPr id="3" name="Notes Placeholder 2"/>
+          <p:cNvSpPr>
+            <a:spLocks noGrp="1"/>
+          </p:cNvSpPr>
+          <p:nvPr>
+            <p:ph type="body" idx="3" sz="quarter"/>
+          </p:nvPr>
+        </p:nvSpPr>
+        <p:spPr/>
+        <p:txBody>
+          <a:bodyPr/>
+          <a:lstStyle/>
+          <a:p>
+            <a:r>
+              <a:t>RETO 5 · Reforma con 500 € — ⚖️ onderhandeling &amp; dilemma</a:t>
+            </a:r>
+          </a:p>
+          <a:p>
+            <a:r>
+              <a:t>OPDRACHT: Beslis wat jullie kopen en zeg exact waar elk ding komt.</a:t>
+            </a:r>
+          </a:p>
+          <a:p>
+            <a:r>
+              <a:t>DE REGEL: Vijfhonderd euro, geen cent meer. En elke aankoop wordt verdedigd met een plaatsbepaling: «la estantería, encima del escritorio, porque…». Zonder plaats telt het voorstel niet.</a:t>
+            </a:r>
+          </a:p>
+          <a:p>
+            <a:r>
+              <a:t>VERLOOP: Mirad la habitación y la lista de precios. | Cada uno propone dos cosas, con su sitio. | Negociad hasta los 500 €. | Presentad la habitación nueva a la clase.</a:t>
+            </a:r>
+          </a:p>
+          <a:p>
+            <a:r>
+              <a:t>SLEUTEL: De kamer is twaalf vierkante meter: de kast van 150 € vreet bijna een derde van het budget én de ruimte. Elke groep botst op die keuze.  ||  De plaatsbepaling is de taalopdracht; het budget is alleen de motor. Toets of elk voorstel een voorzetsel bevat.  ||  De vorm die op de tong ligt («yo pondría») is condicional en hoort niet in dit leerplan. Het marco geeft daarom «yo pongo»; «propongo poner» werkt even goed.</a:t>
+            </a:r>
+          </a:p>
+          <a:p>
+            <a:r>
+              <a:t>NOTA: Werk met echte prijzen van een echte winkel als je die bij de hand hebt. Het verschil in ernst is meteen hoorbaar.</a:t>
+            </a:r>
+          </a:p>
+        </p:txBody>
+      </p:sp>
+    </p:spTree>
+  </p:cSld>
+  <p:clrMapOvr>
+    <a:masterClrMapping/>
+  </p:clrMapOvr>
+</p:notes>
+</file>
+
+<file path=ppt/notesSlides/notesSlide24.xml><?xml version="1.0" encoding="utf-8"?>
+<p:notes xmlns:a="http://schemas.openxmlformats.org/drawingml/2006/main" xmlns:p="http://schemas.openxmlformats.org/presentationml/2006/main" xmlns:r="http://schemas.openxmlformats.org/officeDocument/2006/relationships">
+  <p:cSld>
+    <p:spTree>
+      <p:nvGrpSpPr>
+        <p:cNvPr id="1" name=""/>
+        <p:cNvGrpSpPr/>
+        <p:nvPr/>
+      </p:nvGrpSpPr>
+      <p:grpSpPr>
+        <a:xfrm>
+          <a:off x="0" y="0"/>
+          <a:ext cx="0" cy="0"/>
+          <a:chOff x="0" y="0"/>
+          <a:chExt cx="0" cy="0"/>
+        </a:xfrm>
+      </p:grpSpPr>
+      <p:sp>
+        <p:nvSpPr>
+          <p:cNvPr id="2" name="Slide Image Placeholder 1"/>
+          <p:cNvSpPr>
+            <a:spLocks noGrp="1"/>
+          </p:cNvSpPr>
+          <p:nvPr>
+            <p:ph type="sldImg" idx="2"/>
+          </p:nvPr>
+        </p:nvSpPr>
+        <p:spPr/>
+      </p:sp>
+      <p:sp>
+        <p:nvSpPr>
+          <p:cNvPr id="3" name="Notes Placeholder 2"/>
+          <p:cNvSpPr>
+            <a:spLocks noGrp="1"/>
+          </p:cNvSpPr>
+          <p:nvPr>
+            <p:ph type="body" idx="3" sz="quarter"/>
+          </p:nvPr>
+        </p:nvSpPr>
+        <p:spPr/>
+        <p:txBody>
+          <a:bodyPr/>
+          <a:lstStyle/>
+          <a:p>
+            <a:r>
+              <a:t>RETO 9 · Tour de 40 segundos — 📻 mediaformat</a:t>
+            </a:r>
+          </a:p>
+          <a:p>
+            <a:r>
+              <a:t>OPDRACHT: Doe de rondgang al pratend: zes voorzetsels en drie gerundio's, zonder te stoppen.</a:t>
+            </a:r>
+          </a:p>
+          <a:p>
+            <a:r>
+              <a:t>DE REGEL: Eén doorlopende take van veertig seconden. Stoppen mag niet, herbeginnen wel — maar dan vanaf nul. Zes verschillende voorzetsels en drie gerundio's.</a:t>
+            </a:r>
+          </a:p>
+          <a:p>
+            <a:r>
+              <a:t>VERLOOP: Planifica la ruta: de la puerta al último sitio. | Escribe las seis preposiciones que vas a usar. | Graba de una vez, sin cortes. | ¿Cuarenta segundos? ¿Seis y tres? Si no, otra vez.</a:t>
+            </a:r>
+          </a:p>
+          <a:p>
+            <a:r>
+              <a:t>SLEUTEL: De combinatie is de moeilijkheid: gerundio's om de beweging te dragen («pasando», «subiendo») en voorzetsels om de plaatsen vast te zetten. In één take betekent dat vooruit denken terwijl je praat.  ||  Veertig seconden is bewust krap: het dwingt tot een route in plaats van een opsomming.  ||  Wie zijn eigen huis niet wil filmen, doet de school, een verzonnen huis of alleen de audio. Beoordeeld wordt de taal, niet het beeld.</a:t>
+            </a:r>
+          </a:p>
+          <a:p>
+            <a:r>
+              <a:t>NOTA: Zonder camera werkt het even goed: ogen dicht en de rondgang alleen in woorden. Sommige leerlingen leveren dan hun beste Spaans.</a:t>
+            </a:r>
+          </a:p>
+        </p:txBody>
       </p:sp>
     </p:spTree>
   </p:cSld>
@@ -34346,6 +34598,4371 @@
                 <a:latin typeface="Inter"/>
               </a:rPr>
               <a:t>21</a:t>
+            </a:r>
+          </a:p>
+        </p:txBody>
+      </p:sp>
+    </p:spTree>
+  </p:cSld>
+  <p:clrMapOvr>
+    <a:masterClrMapping/>
+  </p:clrMapOvr>
+</p:sld>
+</file>
+
+<file path=ppt/slides/slide22.xml><?xml version="1.0" encoding="utf-8"?>
+<p:sld xmlns:a="http://schemas.openxmlformats.org/drawingml/2006/main" xmlns:p="http://schemas.openxmlformats.org/presentationml/2006/main" xmlns:r="http://schemas.openxmlformats.org/officeDocument/2006/relationships">
+  <p:cSld>
+    <p:spTree>
+      <p:nvGrpSpPr>
+        <p:cNvPr id="1" name=""/>
+        <p:cNvGrpSpPr/>
+        <p:nvPr/>
+      </p:nvGrpSpPr>
+      <p:grpSpPr/>
+      <p:sp>
+        <p:nvSpPr>
+          <p:cNvPr id="2" name="Fondo"/>
+          <p:cNvSpPr/>
+          <p:nvPr/>
+        </p:nvSpPr>
+        <p:spPr>
+          <a:xfrm>
+            <a:off x="0" y="0"/>
+            <a:ext cx="12191695" cy="6858000"/>
+          </a:xfrm>
+          <a:prstGeom prst="rect">
+            <a:avLst/>
+          </a:prstGeom>
+          <a:solidFill>
+            <a:srgbClr val="FCFBF8"/>
+          </a:solidFill>
+          <a:ln>
+            <a:noFill/>
+          </a:ln>
+          <a:effectLst/>
+        </p:spPr>
+        <p:style>
+          <a:lnRef idx="1">
+            <a:schemeClr val="accent1"/>
+          </a:lnRef>
+          <a:fillRef idx="3">
+            <a:schemeClr val="accent1"/>
+          </a:fillRef>
+          <a:effectRef idx="2">
+            <a:schemeClr val="accent1"/>
+          </a:effectRef>
+          <a:fontRef idx="minor">
+            <a:schemeClr val="lt1"/>
+          </a:fontRef>
+        </p:style>
+        <p:txBody>
+          <a:bodyPr rtlCol="0" anchor="ctr"/>
+          <a:lstStyle/>
+          <a:p/>
+        </p:txBody>
+      </p:sp>
+      <p:sp>
+        <p:nvSpPr>
+          <p:cNvPr id="3" name="Cabecera"/>
+          <p:cNvSpPr/>
+          <p:nvPr/>
+        </p:nvSpPr>
+        <p:spPr>
+          <a:xfrm>
+            <a:off x="0" y="0"/>
+            <a:ext cx="12191695" cy="1078992"/>
+          </a:xfrm>
+          <a:prstGeom prst="rect">
+            <a:avLst/>
+          </a:prstGeom>
+          <a:solidFill>
+            <a:srgbClr val="7C56A9"/>
+          </a:solidFill>
+          <a:ln>
+            <a:noFill/>
+          </a:ln>
+          <a:effectLst/>
+        </p:spPr>
+        <p:style>
+          <a:lnRef idx="1">
+            <a:schemeClr val="accent1"/>
+          </a:lnRef>
+          <a:fillRef idx="3">
+            <a:schemeClr val="accent1"/>
+          </a:fillRef>
+          <a:effectRef idx="2">
+            <a:schemeClr val="accent1"/>
+          </a:effectRef>
+          <a:fontRef idx="minor">
+            <a:schemeClr val="lt1"/>
+          </a:fontRef>
+        </p:style>
+        <p:txBody>
+          <a:bodyPr rtlCol="0" anchor="ctr"/>
+          <a:lstStyle/>
+          <a:p/>
+        </p:txBody>
+      </p:sp>
+      <p:sp>
+        <p:nvSpPr>
+          <p:cNvPr id="4" name="Chip"/>
+          <p:cNvSpPr/>
+          <p:nvPr/>
+        </p:nvSpPr>
+        <p:spPr>
+          <a:xfrm>
+            <a:off x="457200" y="182880"/>
+            <a:ext cx="3017520" cy="292608"/>
+          </a:xfrm>
+          <a:prstGeom prst="roundRect">
+            <a:avLst>
+              <a:gd name="adj" fmla="val 50000"/>
+            </a:avLst>
+          </a:prstGeom>
+          <a:solidFill>
+            <a:srgbClr val="FFFFFF"/>
+          </a:solidFill>
+          <a:ln>
+            <a:noFill/>
+          </a:ln>
+          <a:effectLst/>
+        </p:spPr>
+        <p:style>
+          <a:lnRef idx="1">
+            <a:schemeClr val="accent1"/>
+          </a:lnRef>
+          <a:fillRef idx="3">
+            <a:schemeClr val="accent1"/>
+          </a:fillRef>
+          <a:effectRef idx="2">
+            <a:schemeClr val="accent1"/>
+          </a:effectRef>
+          <a:fontRef idx="minor">
+            <a:schemeClr val="lt1"/>
+          </a:fontRef>
+        </p:style>
+        <p:txBody>
+          <a:bodyPr rtlCol="0" anchor="ctr"/>
+          <a:lstStyle/>
+          <a:p/>
+        </p:txBody>
+      </p:sp>
+      <p:sp>
+        <p:nvSpPr>
+          <p:cNvPr id="5" name="ChipTxt"/>
+          <p:cNvSpPr txBox="1"/>
+          <p:nvPr/>
+        </p:nvSpPr>
+        <p:spPr>
+          <a:xfrm>
+            <a:off x="457200" y="173736"/>
+            <a:ext cx="3017520" cy="310896"/>
+          </a:xfrm>
+          <a:prstGeom prst="rect">
+            <a:avLst/>
+          </a:prstGeom>
+          <a:noFill/>
+        </p:spPr>
+        <p:txBody>
+          <a:bodyPr wrap="square" anchor="ctr" lIns="45720" rIns="45720" tIns="27432" bIns="27432">
+            <a:normAutofit/>
+          </a:bodyPr>
+          <a:lstStyle/>
+          <a:p>
+            <a:pPr algn="ctr"/>
+            <a:r>
+              <a:rPr sz="950" b="1">
+                <a:solidFill>
+                  <a:srgbClr val="5B3E83"/>
+                </a:solidFill>
+                <a:latin typeface="Inter"/>
+              </a:rPr>
+              <a:t>RETO 2 · CREATIEVE BEPERKING</a:t>
+            </a:r>
+          </a:p>
+        </p:txBody>
+      </p:sp>
+      <p:sp>
+        <p:nvSpPr>
+          <p:cNvPr id="6" name="Titulo"/>
+          <p:cNvSpPr txBox="1"/>
+          <p:nvPr/>
+        </p:nvSpPr>
+        <p:spPr>
+          <a:xfrm>
+            <a:off x="457200" y="502920"/>
+            <a:ext cx="8412480" cy="475488"/>
+          </a:xfrm>
+          <a:prstGeom prst="rect">
+            <a:avLst/>
+          </a:prstGeom>
+          <a:noFill/>
+        </p:spPr>
+        <p:txBody>
+          <a:bodyPr wrap="square" anchor="t" lIns="45720" rIns="45720" tIns="27432" bIns="27432">
+            <a:normAutofit/>
+          </a:bodyPr>
+          <a:lstStyle/>
+          <a:p>
+            <a:pPr algn="l"/>
+            <a:r>
+              <a:rPr sz="2700" b="1">
+                <a:solidFill>
+                  <a:srgbClr val="FFFFFF"/>
+                </a:solidFill>
+                <a:latin typeface="Bricolage Grotesque"/>
+              </a:rPr>
+              <a:t>Airbnb honesto</a:t>
+            </a:r>
+          </a:p>
+        </p:txBody>
+      </p:sp>
+      <p:sp>
+        <p:nvSpPr>
+          <p:cNvPr id="7" name="Badges"/>
+          <p:cNvSpPr txBox="1"/>
+          <p:nvPr/>
+        </p:nvSpPr>
+        <p:spPr>
+          <a:xfrm>
+            <a:off x="9052560" y="256032"/>
+            <a:ext cx="2651760" cy="640080"/>
+          </a:xfrm>
+          <a:prstGeom prst="rect">
+            <a:avLst/>
+          </a:prstGeom>
+          <a:noFill/>
+        </p:spPr>
+        <p:txBody>
+          <a:bodyPr wrap="square" anchor="t" lIns="45720" rIns="45720" tIns="27432" bIns="27432">
+            <a:normAutofit/>
+          </a:bodyPr>
+          <a:lstStyle/>
+          <a:p>
+            <a:pPr algn="r"/>
+            <a:r>
+              <a:rPr sz="1000">
+                <a:solidFill>
+                  <a:srgbClr val="EEE8F5"/>
+                </a:solidFill>
+                <a:latin typeface="Inter"/>
+              </a:rPr>
+              <a:t>👥 En parejas</a:t>
+            </a:r>
+          </a:p>
+          <a:p>
+            <a:pPr algn="r"/>
+            <a:r>
+              <a:rPr sz="1000">
+                <a:solidFill>
+                  <a:srgbClr val="EEE8F5"/>
+                </a:solidFill>
+                <a:latin typeface="Inter"/>
+              </a:rPr>
+              <a:t>± 15 min · ★★★</a:t>
+            </a:r>
+          </a:p>
+        </p:txBody>
+      </p:sp>
+      <p:sp>
+        <p:nvSpPr>
+          <p:cNvPr id="8" name="Gancho"/>
+          <p:cNvSpPr txBox="1"/>
+          <p:nvPr/>
+        </p:nvSpPr>
+        <p:spPr>
+          <a:xfrm>
+            <a:off x="457200" y="1225296"/>
+            <a:ext cx="11274552" cy="566928"/>
+          </a:xfrm>
+          <a:prstGeom prst="rect">
+            <a:avLst/>
+          </a:prstGeom>
+          <a:noFill/>
+        </p:spPr>
+        <p:txBody>
+          <a:bodyPr wrap="square" anchor="t" lIns="45720" rIns="45720" tIns="27432" bIns="27432">
+            <a:normAutofit/>
+          </a:bodyPr>
+          <a:lstStyle/>
+          <a:p>
+            <a:pPr algn="l"/>
+            <a:r>
+              <a:rPr sz="1600" b="1">
+                <a:solidFill>
+                  <a:srgbClr val="5B3E83"/>
+                </a:solidFill>
+                <a:latin typeface="Bricolage Grotesque"/>
+              </a:rPr>
+              <a:t>Todos los defectos tienen que salir. Y aún así hay que alquilarlo.</a:t>
+            </a:r>
+          </a:p>
+          <a:p>
+            <a:pPr algn="l"/>
+            <a:r>
+              <a:rPr sz="1100" i="1">
+                <a:solidFill>
+                  <a:srgbClr val="6A6E78"/>
+                </a:solidFill>
+                <a:latin typeface="Inter"/>
+              </a:rPr>
+              <a:t>Alle gebreken moeten erin. En tóch moet het verhuurd raken.</a:t>
+            </a:r>
+          </a:p>
+        </p:txBody>
+      </p:sp>
+      <p:sp>
+        <p:nvSpPr>
+          <p:cNvPr id="9" name="ReglaCaja"/>
+          <p:cNvSpPr/>
+          <p:nvPr/>
+        </p:nvSpPr>
+        <p:spPr>
+          <a:xfrm>
+            <a:off x="457200" y="1847088"/>
+            <a:ext cx="11274552" cy="658368"/>
+          </a:xfrm>
+          <a:prstGeom prst="roundRect">
+            <a:avLst>
+              <a:gd name="adj" fmla="val 5000"/>
+            </a:avLst>
+          </a:prstGeom>
+          <a:solidFill>
+            <a:srgbClr val="FBF3D6"/>
+          </a:solidFill>
+          <a:ln>
+            <a:noFill/>
+          </a:ln>
+          <a:effectLst/>
+        </p:spPr>
+        <p:style>
+          <a:lnRef idx="1">
+            <a:schemeClr val="accent1"/>
+          </a:lnRef>
+          <a:fillRef idx="3">
+            <a:schemeClr val="accent1"/>
+          </a:fillRef>
+          <a:effectRef idx="2">
+            <a:schemeClr val="accent1"/>
+          </a:effectRef>
+          <a:fontRef idx="minor">
+            <a:schemeClr val="lt1"/>
+          </a:fontRef>
+        </p:style>
+        <p:txBody>
+          <a:bodyPr rtlCol="0" anchor="ctr"/>
+          <a:lstStyle/>
+          <a:p/>
+        </p:txBody>
+      </p:sp>
+      <p:sp>
+        <p:nvSpPr>
+          <p:cNvPr id="10" name="ReglaTxt"/>
+          <p:cNvSpPr txBox="1"/>
+          <p:nvPr/>
+        </p:nvSpPr>
+        <p:spPr>
+          <a:xfrm>
+            <a:off x="603504" y="1883664"/>
+            <a:ext cx="10972800" cy="585216"/>
+          </a:xfrm>
+          <a:prstGeom prst="rect">
+            <a:avLst/>
+          </a:prstGeom>
+          <a:noFill/>
+        </p:spPr>
+        <p:txBody>
+          <a:bodyPr wrap="square" anchor="t" lIns="45720" rIns="45720" tIns="27432" bIns="27432">
+            <a:normAutofit/>
+          </a:bodyPr>
+          <a:lstStyle/>
+          <a:p>
+            <a:pPr algn="l"/>
+            <a:r>
+              <a:rPr sz="850" b="1">
+                <a:solidFill>
+                  <a:srgbClr val="B7860B"/>
+                </a:solidFill>
+                <a:latin typeface="Inter"/>
+              </a:rPr>
+              <a:t>LA REGLA DEL RETO</a:t>
+            </a:r>
+          </a:p>
+          <a:p>
+            <a:pPr algn="l"/>
+            <a:r>
+              <a:rPr sz="1100">
+                <a:solidFill>
+                  <a:srgbClr val="20242E"/>
+                </a:solidFill>
+                <a:latin typeface="Inter"/>
+              </a:rPr>
+              <a:t>Alle zes de gebreken staan erin, letterlijk. Je mag ze omkaderen maar niet weglaten, en je mag niets verzinnen dat er niet is.</a:t>
+            </a:r>
+          </a:p>
+        </p:txBody>
+      </p:sp>
+      <p:sp>
+        <p:nvSpPr>
+          <p:cNvPr id="11" name="Tarjeta 0"/>
+          <p:cNvSpPr/>
+          <p:nvPr/>
+        </p:nvSpPr>
+        <p:spPr>
+          <a:xfrm>
+            <a:off x="457200" y="2670048"/>
+            <a:ext cx="2708910" cy="898398"/>
+          </a:xfrm>
+          <a:prstGeom prst="roundRect">
+            <a:avLst>
+              <a:gd name="adj" fmla="val 6000"/>
+            </a:avLst>
+          </a:prstGeom>
+          <a:solidFill>
+            <a:srgbClr val="FFFFFF"/>
+          </a:solidFill>
+          <a:ln w="12700">
+            <a:solidFill>
+              <a:srgbClr val="E4E3DE"/>
+            </a:solidFill>
+          </a:ln>
+          <a:effectLst/>
+        </p:spPr>
+        <p:style>
+          <a:lnRef idx="1">
+            <a:schemeClr val="accent1"/>
+          </a:lnRef>
+          <a:fillRef idx="3">
+            <a:schemeClr val="accent1"/>
+          </a:fillRef>
+          <a:effectRef idx="2">
+            <a:schemeClr val="accent1"/>
+          </a:effectRef>
+          <a:fontRef idx="minor">
+            <a:schemeClr val="lt1"/>
+          </a:fontRef>
+        </p:style>
+        <p:txBody>
+          <a:bodyPr rtlCol="0" anchor="ctr"/>
+          <a:lstStyle/>
+          <a:p/>
+        </p:txBody>
+      </p:sp>
+      <p:sp>
+        <p:nvSpPr>
+          <p:cNvPr id="12" name="TarjetaTxt 0"/>
+          <p:cNvSpPr txBox="1"/>
+          <p:nvPr/>
+        </p:nvSpPr>
+        <p:spPr>
+          <a:xfrm>
+            <a:off x="548640" y="2724912"/>
+            <a:ext cx="2526030" cy="788670"/>
+          </a:xfrm>
+          <a:prstGeom prst="rect">
+            <a:avLst/>
+          </a:prstGeom>
+          <a:noFill/>
+        </p:spPr>
+        <p:txBody>
+          <a:bodyPr wrap="square" anchor="t" lIns="45720" rIns="45720" tIns="27432" bIns="27432">
+            <a:normAutofit/>
+          </a:bodyPr>
+          <a:lstStyle/>
+          <a:p>
+            <a:pPr algn="l"/>
+            <a:r>
+              <a:rPr sz="1100" b="1">
+                <a:solidFill>
+                  <a:srgbClr val="5B3E83"/>
+                </a:solidFill>
+                <a:latin typeface="Bricolage Grotesque"/>
+              </a:rPr>
+              <a:t>dónde</a:t>
+            </a:r>
+          </a:p>
+          <a:p>
+            <a:pPr algn="l"/>
+            <a:r>
+              <a:rPr sz="1000">
+                <a:solidFill>
+                  <a:srgbClr val="20242E"/>
+                </a:solidFill>
+                <a:latin typeface="Inter"/>
+              </a:rPr>
+              <a:t>en el centro, a dos minutos de la plaza</a:t>
+            </a:r>
+          </a:p>
+        </p:txBody>
+      </p:sp>
+      <p:sp>
+        <p:nvSpPr>
+          <p:cNvPr id="13" name="Tarjeta 1"/>
+          <p:cNvSpPr/>
+          <p:nvPr/>
+        </p:nvSpPr>
+        <p:spPr>
+          <a:xfrm>
+            <a:off x="3312414" y="2670048"/>
+            <a:ext cx="2708910" cy="898398"/>
+          </a:xfrm>
+          <a:prstGeom prst="roundRect">
+            <a:avLst>
+              <a:gd name="adj" fmla="val 6000"/>
+            </a:avLst>
+          </a:prstGeom>
+          <a:solidFill>
+            <a:srgbClr val="FFFFFF"/>
+          </a:solidFill>
+          <a:ln w="12700">
+            <a:solidFill>
+              <a:srgbClr val="E4E3DE"/>
+            </a:solidFill>
+          </a:ln>
+          <a:effectLst/>
+        </p:spPr>
+        <p:style>
+          <a:lnRef idx="1">
+            <a:schemeClr val="accent1"/>
+          </a:lnRef>
+          <a:fillRef idx="3">
+            <a:schemeClr val="accent1"/>
+          </a:fillRef>
+          <a:effectRef idx="2">
+            <a:schemeClr val="accent1"/>
+          </a:effectRef>
+          <a:fontRef idx="minor">
+            <a:schemeClr val="lt1"/>
+          </a:fontRef>
+        </p:style>
+        <p:txBody>
+          <a:bodyPr rtlCol="0" anchor="ctr"/>
+          <a:lstStyle/>
+          <a:p/>
+        </p:txBody>
+      </p:sp>
+      <p:sp>
+        <p:nvSpPr>
+          <p:cNvPr id="14" name="TarjetaTxt 1"/>
+          <p:cNvSpPr txBox="1"/>
+          <p:nvPr/>
+        </p:nvSpPr>
+        <p:spPr>
+          <a:xfrm>
+            <a:off x="3403854" y="2724912"/>
+            <a:ext cx="2526030" cy="788670"/>
+          </a:xfrm>
+          <a:prstGeom prst="rect">
+            <a:avLst/>
+          </a:prstGeom>
+          <a:noFill/>
+        </p:spPr>
+        <p:txBody>
+          <a:bodyPr wrap="square" anchor="t" lIns="45720" rIns="45720" tIns="27432" bIns="27432">
+            <a:normAutofit/>
+          </a:bodyPr>
+          <a:lstStyle/>
+          <a:p>
+            <a:pPr algn="l"/>
+            <a:r>
+              <a:rPr sz="1100" b="1">
+                <a:solidFill>
+                  <a:srgbClr val="5B3E83"/>
+                </a:solidFill>
+                <a:latin typeface="Bricolage Grotesque"/>
+              </a:rPr>
+              <a:t>tamaño</a:t>
+            </a:r>
+          </a:p>
+          <a:p>
+            <a:pPr algn="l"/>
+            <a:r>
+              <a:rPr sz="1000">
+                <a:solidFill>
+                  <a:srgbClr val="20242E"/>
+                </a:solidFill>
+                <a:latin typeface="Inter"/>
+              </a:rPr>
+              <a:t>35 m², una habitación</a:t>
+            </a:r>
+          </a:p>
+        </p:txBody>
+      </p:sp>
+      <p:sp>
+        <p:nvSpPr>
+          <p:cNvPr id="15" name="Tarjeta 2"/>
+          <p:cNvSpPr/>
+          <p:nvPr/>
+        </p:nvSpPr>
+        <p:spPr>
+          <a:xfrm>
+            <a:off x="6167628" y="2670048"/>
+            <a:ext cx="2708910" cy="898398"/>
+          </a:xfrm>
+          <a:prstGeom prst="roundRect">
+            <a:avLst>
+              <a:gd name="adj" fmla="val 6000"/>
+            </a:avLst>
+          </a:prstGeom>
+          <a:solidFill>
+            <a:srgbClr val="FFFFFF"/>
+          </a:solidFill>
+          <a:ln w="12700">
+            <a:solidFill>
+              <a:srgbClr val="E4E3DE"/>
+            </a:solidFill>
+          </a:ln>
+          <a:effectLst/>
+        </p:spPr>
+        <p:style>
+          <a:lnRef idx="1">
+            <a:schemeClr val="accent1"/>
+          </a:lnRef>
+          <a:fillRef idx="3">
+            <a:schemeClr val="accent1"/>
+          </a:fillRef>
+          <a:effectRef idx="2">
+            <a:schemeClr val="accent1"/>
+          </a:effectRef>
+          <a:fontRef idx="minor">
+            <a:schemeClr val="lt1"/>
+          </a:fontRef>
+        </p:style>
+        <p:txBody>
+          <a:bodyPr rtlCol="0" anchor="ctr"/>
+          <a:lstStyle/>
+          <a:p/>
+        </p:txBody>
+      </p:sp>
+      <p:sp>
+        <p:nvSpPr>
+          <p:cNvPr id="16" name="TarjetaTxt 2"/>
+          <p:cNvSpPr txBox="1"/>
+          <p:nvPr/>
+        </p:nvSpPr>
+        <p:spPr>
+          <a:xfrm>
+            <a:off x="6259068" y="2724912"/>
+            <a:ext cx="2526030" cy="788670"/>
+          </a:xfrm>
+          <a:prstGeom prst="rect">
+            <a:avLst/>
+          </a:prstGeom>
+          <a:noFill/>
+        </p:spPr>
+        <p:txBody>
+          <a:bodyPr wrap="square" anchor="t" lIns="45720" rIns="45720" tIns="27432" bIns="27432">
+            <a:normAutofit/>
+          </a:bodyPr>
+          <a:lstStyle/>
+          <a:p>
+            <a:pPr algn="l"/>
+            <a:r>
+              <a:rPr sz="1100" b="1">
+                <a:solidFill>
+                  <a:srgbClr val="5B3E83"/>
+                </a:solidFill>
+                <a:latin typeface="Bricolage Grotesque"/>
+              </a:rPr>
+              <a:t>precio</a:t>
+            </a:r>
+          </a:p>
+          <a:p>
+            <a:pPr algn="l"/>
+            <a:r>
+              <a:rPr sz="1000">
+                <a:solidFill>
+                  <a:srgbClr val="20242E"/>
+                </a:solidFill>
+                <a:latin typeface="Inter"/>
+              </a:rPr>
+              <a:t>450 € al mes</a:t>
+            </a:r>
+          </a:p>
+        </p:txBody>
+      </p:sp>
+      <p:sp>
+        <p:nvSpPr>
+          <p:cNvPr id="17" name="Tarjeta 3"/>
+          <p:cNvSpPr/>
+          <p:nvPr/>
+        </p:nvSpPr>
+        <p:spPr>
+          <a:xfrm>
+            <a:off x="9022842" y="2670048"/>
+            <a:ext cx="2708910" cy="898398"/>
+          </a:xfrm>
+          <a:prstGeom prst="roundRect">
+            <a:avLst>
+              <a:gd name="adj" fmla="val 6000"/>
+            </a:avLst>
+          </a:prstGeom>
+          <a:solidFill>
+            <a:srgbClr val="FFFFFF"/>
+          </a:solidFill>
+          <a:ln w="12700">
+            <a:solidFill>
+              <a:srgbClr val="E4E3DE"/>
+            </a:solidFill>
+          </a:ln>
+          <a:effectLst/>
+        </p:spPr>
+        <p:style>
+          <a:lnRef idx="1">
+            <a:schemeClr val="accent1"/>
+          </a:lnRef>
+          <a:fillRef idx="3">
+            <a:schemeClr val="accent1"/>
+          </a:fillRef>
+          <a:effectRef idx="2">
+            <a:schemeClr val="accent1"/>
+          </a:effectRef>
+          <a:fontRef idx="minor">
+            <a:schemeClr val="lt1"/>
+          </a:fontRef>
+        </p:style>
+        <p:txBody>
+          <a:bodyPr rtlCol="0" anchor="ctr"/>
+          <a:lstStyle/>
+          <a:p/>
+        </p:txBody>
+      </p:sp>
+      <p:sp>
+        <p:nvSpPr>
+          <p:cNvPr id="18" name="TarjetaTxt 3"/>
+          <p:cNvSpPr txBox="1"/>
+          <p:nvPr/>
+        </p:nvSpPr>
+        <p:spPr>
+          <a:xfrm>
+            <a:off x="9114282" y="2724912"/>
+            <a:ext cx="2526030" cy="788670"/>
+          </a:xfrm>
+          <a:prstGeom prst="rect">
+            <a:avLst/>
+          </a:prstGeom>
+          <a:noFill/>
+        </p:spPr>
+        <p:txBody>
+          <a:bodyPr wrap="square" anchor="t" lIns="45720" rIns="45720" tIns="27432" bIns="27432">
+            <a:normAutofit/>
+          </a:bodyPr>
+          <a:lstStyle/>
+          <a:p>
+            <a:pPr algn="l"/>
+            <a:r>
+              <a:rPr sz="1100" b="1">
+                <a:solidFill>
+                  <a:srgbClr val="5B3E83"/>
+                </a:solidFill>
+                <a:latin typeface="Bricolage Grotesque"/>
+              </a:rPr>
+              <a:t>defecto</a:t>
+            </a:r>
+          </a:p>
+          <a:p>
+            <a:pPr algn="l"/>
+            <a:r>
+              <a:rPr sz="1000">
+                <a:solidFill>
+                  <a:srgbClr val="20242E"/>
+                </a:solidFill>
+                <a:latin typeface="Inter"/>
+              </a:rPr>
+              <a:t>está en un cuarto piso y no hay ascensor</a:t>
+            </a:r>
+          </a:p>
+        </p:txBody>
+      </p:sp>
+      <p:sp>
+        <p:nvSpPr>
+          <p:cNvPr id="19" name="Tarjeta 4"/>
+          <p:cNvSpPr/>
+          <p:nvPr/>
+        </p:nvSpPr>
+        <p:spPr>
+          <a:xfrm>
+            <a:off x="457200" y="3696462"/>
+            <a:ext cx="2708910" cy="898398"/>
+          </a:xfrm>
+          <a:prstGeom prst="roundRect">
+            <a:avLst>
+              <a:gd name="adj" fmla="val 6000"/>
+            </a:avLst>
+          </a:prstGeom>
+          <a:solidFill>
+            <a:srgbClr val="FFFFFF"/>
+          </a:solidFill>
+          <a:ln w="12700">
+            <a:solidFill>
+              <a:srgbClr val="E4E3DE"/>
+            </a:solidFill>
+          </a:ln>
+          <a:effectLst/>
+        </p:spPr>
+        <p:style>
+          <a:lnRef idx="1">
+            <a:schemeClr val="accent1"/>
+          </a:lnRef>
+          <a:fillRef idx="3">
+            <a:schemeClr val="accent1"/>
+          </a:fillRef>
+          <a:effectRef idx="2">
+            <a:schemeClr val="accent1"/>
+          </a:effectRef>
+          <a:fontRef idx="minor">
+            <a:schemeClr val="lt1"/>
+          </a:fontRef>
+        </p:style>
+        <p:txBody>
+          <a:bodyPr rtlCol="0" anchor="ctr"/>
+          <a:lstStyle/>
+          <a:p/>
+        </p:txBody>
+      </p:sp>
+      <p:sp>
+        <p:nvSpPr>
+          <p:cNvPr id="20" name="TarjetaTxt 4"/>
+          <p:cNvSpPr txBox="1"/>
+          <p:nvPr/>
+        </p:nvSpPr>
+        <p:spPr>
+          <a:xfrm>
+            <a:off x="548640" y="3751326"/>
+            <a:ext cx="2526030" cy="788670"/>
+          </a:xfrm>
+          <a:prstGeom prst="rect">
+            <a:avLst/>
+          </a:prstGeom>
+          <a:noFill/>
+        </p:spPr>
+        <p:txBody>
+          <a:bodyPr wrap="square" anchor="t" lIns="45720" rIns="45720" tIns="27432" bIns="27432">
+            <a:normAutofit/>
+          </a:bodyPr>
+          <a:lstStyle/>
+          <a:p>
+            <a:pPr algn="l"/>
+            <a:r>
+              <a:rPr sz="1100" b="1">
+                <a:solidFill>
+                  <a:srgbClr val="5B3E83"/>
+                </a:solidFill>
+                <a:latin typeface="Bricolage Grotesque"/>
+              </a:rPr>
+              <a:t>defecto</a:t>
+            </a:r>
+          </a:p>
+          <a:p>
+            <a:pPr algn="l"/>
+            <a:r>
+              <a:rPr sz="1000">
+                <a:solidFill>
+                  <a:srgbClr val="20242E"/>
+                </a:solidFill>
+                <a:latin typeface="Inter"/>
+              </a:rPr>
+              <a:t>la ventana da a un patio interior: hay poca luz</a:t>
+            </a:r>
+          </a:p>
+        </p:txBody>
+      </p:sp>
+      <p:sp>
+        <p:nvSpPr>
+          <p:cNvPr id="21" name="Tarjeta 5"/>
+          <p:cNvSpPr/>
+          <p:nvPr/>
+        </p:nvSpPr>
+        <p:spPr>
+          <a:xfrm>
+            <a:off x="3312414" y="3696462"/>
+            <a:ext cx="2708910" cy="898398"/>
+          </a:xfrm>
+          <a:prstGeom prst="roundRect">
+            <a:avLst>
+              <a:gd name="adj" fmla="val 6000"/>
+            </a:avLst>
+          </a:prstGeom>
+          <a:solidFill>
+            <a:srgbClr val="FFFFFF"/>
+          </a:solidFill>
+          <a:ln w="12700">
+            <a:solidFill>
+              <a:srgbClr val="E4E3DE"/>
+            </a:solidFill>
+          </a:ln>
+          <a:effectLst/>
+        </p:spPr>
+        <p:style>
+          <a:lnRef idx="1">
+            <a:schemeClr val="accent1"/>
+          </a:lnRef>
+          <a:fillRef idx="3">
+            <a:schemeClr val="accent1"/>
+          </a:fillRef>
+          <a:effectRef idx="2">
+            <a:schemeClr val="accent1"/>
+          </a:effectRef>
+          <a:fontRef idx="minor">
+            <a:schemeClr val="lt1"/>
+          </a:fontRef>
+        </p:style>
+        <p:txBody>
+          <a:bodyPr rtlCol="0" anchor="ctr"/>
+          <a:lstStyle/>
+          <a:p/>
+        </p:txBody>
+      </p:sp>
+      <p:sp>
+        <p:nvSpPr>
+          <p:cNvPr id="22" name="TarjetaTxt 5"/>
+          <p:cNvSpPr txBox="1"/>
+          <p:nvPr/>
+        </p:nvSpPr>
+        <p:spPr>
+          <a:xfrm>
+            <a:off x="3403854" y="3751326"/>
+            <a:ext cx="2526030" cy="788670"/>
+          </a:xfrm>
+          <a:prstGeom prst="rect">
+            <a:avLst/>
+          </a:prstGeom>
+          <a:noFill/>
+        </p:spPr>
+        <p:txBody>
+          <a:bodyPr wrap="square" anchor="t" lIns="45720" rIns="45720" tIns="27432" bIns="27432">
+            <a:normAutofit/>
+          </a:bodyPr>
+          <a:lstStyle/>
+          <a:p>
+            <a:pPr algn="l"/>
+            <a:r>
+              <a:rPr sz="1100" b="1">
+                <a:solidFill>
+                  <a:srgbClr val="5B3E83"/>
+                </a:solidFill>
+                <a:latin typeface="Bricolage Grotesque"/>
+              </a:rPr>
+              <a:t>defecto</a:t>
+            </a:r>
+          </a:p>
+          <a:p>
+            <a:pPr algn="l"/>
+            <a:r>
+              <a:rPr sz="1000">
+                <a:solidFill>
+                  <a:srgbClr val="20242E"/>
+                </a:solidFill>
+                <a:latin typeface="Inter"/>
+              </a:rPr>
+              <a:t>el bar de abajo cierra a las dos de la mañana</a:t>
+            </a:r>
+          </a:p>
+        </p:txBody>
+      </p:sp>
+      <p:sp>
+        <p:nvSpPr>
+          <p:cNvPr id="23" name="Tarjeta 6"/>
+          <p:cNvSpPr/>
+          <p:nvPr/>
+        </p:nvSpPr>
+        <p:spPr>
+          <a:xfrm>
+            <a:off x="6167628" y="3696462"/>
+            <a:ext cx="2708910" cy="898398"/>
+          </a:xfrm>
+          <a:prstGeom prst="roundRect">
+            <a:avLst>
+              <a:gd name="adj" fmla="val 6000"/>
+            </a:avLst>
+          </a:prstGeom>
+          <a:solidFill>
+            <a:srgbClr val="FFFFFF"/>
+          </a:solidFill>
+          <a:ln w="12700">
+            <a:solidFill>
+              <a:srgbClr val="E4E3DE"/>
+            </a:solidFill>
+          </a:ln>
+          <a:effectLst/>
+        </p:spPr>
+        <p:style>
+          <a:lnRef idx="1">
+            <a:schemeClr val="accent1"/>
+          </a:lnRef>
+          <a:fillRef idx="3">
+            <a:schemeClr val="accent1"/>
+          </a:fillRef>
+          <a:effectRef idx="2">
+            <a:schemeClr val="accent1"/>
+          </a:effectRef>
+          <a:fontRef idx="minor">
+            <a:schemeClr val="lt1"/>
+          </a:fontRef>
+        </p:style>
+        <p:txBody>
+          <a:bodyPr rtlCol="0" anchor="ctr"/>
+          <a:lstStyle/>
+          <a:p/>
+        </p:txBody>
+      </p:sp>
+      <p:sp>
+        <p:nvSpPr>
+          <p:cNvPr id="24" name="TarjetaTxt 6"/>
+          <p:cNvSpPr txBox="1"/>
+          <p:nvPr/>
+        </p:nvSpPr>
+        <p:spPr>
+          <a:xfrm>
+            <a:off x="6259068" y="3751326"/>
+            <a:ext cx="2526030" cy="788670"/>
+          </a:xfrm>
+          <a:prstGeom prst="rect">
+            <a:avLst/>
+          </a:prstGeom>
+          <a:noFill/>
+        </p:spPr>
+        <p:txBody>
+          <a:bodyPr wrap="square" anchor="t" lIns="45720" rIns="45720" tIns="27432" bIns="27432">
+            <a:normAutofit/>
+          </a:bodyPr>
+          <a:lstStyle/>
+          <a:p>
+            <a:pPr algn="l"/>
+            <a:r>
+              <a:rPr sz="1100" b="1">
+                <a:solidFill>
+                  <a:srgbClr val="5B3E83"/>
+                </a:solidFill>
+                <a:latin typeface="Bricolage Grotesque"/>
+              </a:rPr>
+              <a:t>defecto</a:t>
+            </a:r>
+          </a:p>
+          <a:p>
+            <a:pPr algn="l"/>
+            <a:r>
+              <a:rPr sz="1000">
+                <a:solidFill>
+                  <a:srgbClr val="20242E"/>
+                </a:solidFill>
+                <a:latin typeface="Inter"/>
+              </a:rPr>
+              <a:t>no hay lavadora</a:t>
+            </a:r>
+          </a:p>
+        </p:txBody>
+      </p:sp>
+      <p:sp>
+        <p:nvSpPr>
+          <p:cNvPr id="25" name="Tarjeta 7"/>
+          <p:cNvSpPr/>
+          <p:nvPr/>
+        </p:nvSpPr>
+        <p:spPr>
+          <a:xfrm>
+            <a:off x="9022842" y="3696462"/>
+            <a:ext cx="2708910" cy="898398"/>
+          </a:xfrm>
+          <a:prstGeom prst="roundRect">
+            <a:avLst>
+              <a:gd name="adj" fmla="val 6000"/>
+            </a:avLst>
+          </a:prstGeom>
+          <a:solidFill>
+            <a:srgbClr val="FFFFFF"/>
+          </a:solidFill>
+          <a:ln w="12700">
+            <a:solidFill>
+              <a:srgbClr val="E4E3DE"/>
+            </a:solidFill>
+          </a:ln>
+          <a:effectLst/>
+        </p:spPr>
+        <p:style>
+          <a:lnRef idx="1">
+            <a:schemeClr val="accent1"/>
+          </a:lnRef>
+          <a:fillRef idx="3">
+            <a:schemeClr val="accent1"/>
+          </a:fillRef>
+          <a:effectRef idx="2">
+            <a:schemeClr val="accent1"/>
+          </a:effectRef>
+          <a:fontRef idx="minor">
+            <a:schemeClr val="lt1"/>
+          </a:fontRef>
+        </p:style>
+        <p:txBody>
+          <a:bodyPr rtlCol="0" anchor="ctr"/>
+          <a:lstStyle/>
+          <a:p/>
+        </p:txBody>
+      </p:sp>
+      <p:sp>
+        <p:nvSpPr>
+          <p:cNvPr id="26" name="TarjetaTxt 7"/>
+          <p:cNvSpPr txBox="1"/>
+          <p:nvPr/>
+        </p:nvSpPr>
+        <p:spPr>
+          <a:xfrm>
+            <a:off x="9114282" y="3751326"/>
+            <a:ext cx="2526030" cy="788670"/>
+          </a:xfrm>
+          <a:prstGeom prst="rect">
+            <a:avLst/>
+          </a:prstGeom>
+          <a:noFill/>
+        </p:spPr>
+        <p:txBody>
+          <a:bodyPr wrap="square" anchor="t" lIns="45720" rIns="45720" tIns="27432" bIns="27432">
+            <a:normAutofit/>
+          </a:bodyPr>
+          <a:lstStyle/>
+          <a:p>
+            <a:pPr algn="l"/>
+            <a:r>
+              <a:rPr sz="1100" b="1">
+                <a:solidFill>
+                  <a:srgbClr val="5B3E83"/>
+                </a:solidFill>
+                <a:latin typeface="Bricolage Grotesque"/>
+              </a:rPr>
+              <a:t>defecto</a:t>
+            </a:r>
+          </a:p>
+          <a:p>
+            <a:pPr algn="l"/>
+            <a:r>
+              <a:rPr sz="1000">
+                <a:solidFill>
+                  <a:srgbClr val="20242E"/>
+                </a:solidFill>
+                <a:latin typeface="Inter"/>
+              </a:rPr>
+              <a:t>la cocina está dentro del salón</a:t>
+            </a:r>
+          </a:p>
+        </p:txBody>
+      </p:sp>
+      <p:sp>
+        <p:nvSpPr>
+          <p:cNvPr id="27" name="Tarjeta 8"/>
+          <p:cNvSpPr/>
+          <p:nvPr/>
+        </p:nvSpPr>
+        <p:spPr>
+          <a:xfrm>
+            <a:off x="457200" y="4722876"/>
+            <a:ext cx="2708910" cy="898398"/>
+          </a:xfrm>
+          <a:prstGeom prst="roundRect">
+            <a:avLst>
+              <a:gd name="adj" fmla="val 6000"/>
+            </a:avLst>
+          </a:prstGeom>
+          <a:solidFill>
+            <a:srgbClr val="FFFFFF"/>
+          </a:solidFill>
+          <a:ln w="12700">
+            <a:solidFill>
+              <a:srgbClr val="E4E3DE"/>
+            </a:solidFill>
+          </a:ln>
+          <a:effectLst/>
+        </p:spPr>
+        <p:style>
+          <a:lnRef idx="1">
+            <a:schemeClr val="accent1"/>
+          </a:lnRef>
+          <a:fillRef idx="3">
+            <a:schemeClr val="accent1"/>
+          </a:fillRef>
+          <a:effectRef idx="2">
+            <a:schemeClr val="accent1"/>
+          </a:effectRef>
+          <a:fontRef idx="minor">
+            <a:schemeClr val="lt1"/>
+          </a:fontRef>
+        </p:style>
+        <p:txBody>
+          <a:bodyPr rtlCol="0" anchor="ctr"/>
+          <a:lstStyle/>
+          <a:p/>
+        </p:txBody>
+      </p:sp>
+      <p:sp>
+        <p:nvSpPr>
+          <p:cNvPr id="28" name="TarjetaTxt 8"/>
+          <p:cNvSpPr txBox="1"/>
+          <p:nvPr/>
+        </p:nvSpPr>
+        <p:spPr>
+          <a:xfrm>
+            <a:off x="548640" y="4777740"/>
+            <a:ext cx="2526030" cy="788670"/>
+          </a:xfrm>
+          <a:prstGeom prst="rect">
+            <a:avLst/>
+          </a:prstGeom>
+          <a:noFill/>
+        </p:spPr>
+        <p:txBody>
+          <a:bodyPr wrap="square" anchor="t" lIns="45720" rIns="45720" tIns="27432" bIns="27432">
+            <a:normAutofit/>
+          </a:bodyPr>
+          <a:lstStyle/>
+          <a:p>
+            <a:pPr algn="l"/>
+            <a:r>
+              <a:rPr sz="1100" b="1">
+                <a:solidFill>
+                  <a:srgbClr val="5B3E83"/>
+                </a:solidFill>
+                <a:latin typeface="Bricolage Grotesque"/>
+              </a:rPr>
+              <a:t>defecto</a:t>
+            </a:r>
+          </a:p>
+          <a:p>
+            <a:pPr algn="l"/>
+            <a:r>
+              <a:rPr sz="1000">
+                <a:solidFill>
+                  <a:srgbClr val="20242E"/>
+                </a:solidFill>
+                <a:latin typeface="Inter"/>
+              </a:rPr>
+              <a:t>las paredes son muy finas</a:t>
+            </a:r>
+          </a:p>
+        </p:txBody>
+      </p:sp>
+      <p:sp>
+        <p:nvSpPr>
+          <p:cNvPr id="29" name="Tarjeta 9"/>
+          <p:cNvSpPr/>
+          <p:nvPr/>
+        </p:nvSpPr>
+        <p:spPr>
+          <a:xfrm>
+            <a:off x="3312414" y="4722876"/>
+            <a:ext cx="2708910" cy="898398"/>
+          </a:xfrm>
+          <a:prstGeom prst="roundRect">
+            <a:avLst>
+              <a:gd name="adj" fmla="val 6000"/>
+            </a:avLst>
+          </a:prstGeom>
+          <a:solidFill>
+            <a:srgbClr val="FFFFFF"/>
+          </a:solidFill>
+          <a:ln w="12700">
+            <a:solidFill>
+              <a:srgbClr val="E4E3DE"/>
+            </a:solidFill>
+          </a:ln>
+          <a:effectLst/>
+        </p:spPr>
+        <p:style>
+          <a:lnRef idx="1">
+            <a:schemeClr val="accent1"/>
+          </a:lnRef>
+          <a:fillRef idx="3">
+            <a:schemeClr val="accent1"/>
+          </a:fillRef>
+          <a:effectRef idx="2">
+            <a:schemeClr val="accent1"/>
+          </a:effectRef>
+          <a:fontRef idx="minor">
+            <a:schemeClr val="lt1"/>
+          </a:fontRef>
+        </p:style>
+        <p:txBody>
+          <a:bodyPr rtlCol="0" anchor="ctr"/>
+          <a:lstStyle/>
+          <a:p/>
+        </p:txBody>
+      </p:sp>
+      <p:sp>
+        <p:nvSpPr>
+          <p:cNvPr id="30" name="TarjetaTxt 9"/>
+          <p:cNvSpPr txBox="1"/>
+          <p:nvPr/>
+        </p:nvSpPr>
+        <p:spPr>
+          <a:xfrm>
+            <a:off x="3403854" y="4777740"/>
+            <a:ext cx="2526030" cy="788670"/>
+          </a:xfrm>
+          <a:prstGeom prst="rect">
+            <a:avLst/>
+          </a:prstGeom>
+          <a:noFill/>
+        </p:spPr>
+        <p:txBody>
+          <a:bodyPr wrap="square" anchor="t" lIns="45720" rIns="45720" tIns="27432" bIns="27432">
+            <a:normAutofit/>
+          </a:bodyPr>
+          <a:lstStyle/>
+          <a:p>
+            <a:pPr algn="l"/>
+            <a:r>
+              <a:rPr sz="1100" b="1">
+                <a:solidFill>
+                  <a:srgbClr val="5B3E83"/>
+                </a:solidFill>
+                <a:latin typeface="Bricolage Grotesque"/>
+              </a:rPr>
+              <a:t>marco</a:t>
+            </a:r>
+          </a:p>
+          <a:p>
+            <a:pPr algn="l"/>
+            <a:r>
+              <a:rPr sz="1000">
+                <a:solidFill>
+                  <a:srgbClr val="20242E"/>
+                </a:solidFill>
+                <a:latin typeface="Inter"/>
+              </a:rPr>
+              <a:t>Se alquila … en …</a:t>
+            </a:r>
+          </a:p>
+        </p:txBody>
+      </p:sp>
+      <p:sp>
+        <p:nvSpPr>
+          <p:cNvPr id="31" name="Tarjeta 10"/>
+          <p:cNvSpPr/>
+          <p:nvPr/>
+        </p:nvSpPr>
+        <p:spPr>
+          <a:xfrm>
+            <a:off x="6167628" y="4722876"/>
+            <a:ext cx="2708910" cy="898398"/>
+          </a:xfrm>
+          <a:prstGeom prst="roundRect">
+            <a:avLst>
+              <a:gd name="adj" fmla="val 6000"/>
+            </a:avLst>
+          </a:prstGeom>
+          <a:solidFill>
+            <a:srgbClr val="FFFFFF"/>
+          </a:solidFill>
+          <a:ln w="12700">
+            <a:solidFill>
+              <a:srgbClr val="E4E3DE"/>
+            </a:solidFill>
+          </a:ln>
+          <a:effectLst/>
+        </p:spPr>
+        <p:style>
+          <a:lnRef idx="1">
+            <a:schemeClr val="accent1"/>
+          </a:lnRef>
+          <a:fillRef idx="3">
+            <a:schemeClr val="accent1"/>
+          </a:fillRef>
+          <a:effectRef idx="2">
+            <a:schemeClr val="accent1"/>
+          </a:effectRef>
+          <a:fontRef idx="minor">
+            <a:schemeClr val="lt1"/>
+          </a:fontRef>
+        </p:style>
+        <p:txBody>
+          <a:bodyPr rtlCol="0" anchor="ctr"/>
+          <a:lstStyle/>
+          <a:p/>
+        </p:txBody>
+      </p:sp>
+      <p:sp>
+        <p:nvSpPr>
+          <p:cNvPr id="32" name="TarjetaTxt 10"/>
+          <p:cNvSpPr txBox="1"/>
+          <p:nvPr/>
+        </p:nvSpPr>
+        <p:spPr>
+          <a:xfrm>
+            <a:off x="6259068" y="4777740"/>
+            <a:ext cx="2526030" cy="788670"/>
+          </a:xfrm>
+          <a:prstGeom prst="rect">
+            <a:avLst/>
+          </a:prstGeom>
+          <a:noFill/>
+        </p:spPr>
+        <p:txBody>
+          <a:bodyPr wrap="square" anchor="t" lIns="45720" rIns="45720" tIns="27432" bIns="27432">
+            <a:normAutofit/>
+          </a:bodyPr>
+          <a:lstStyle/>
+          <a:p>
+            <a:pPr algn="l"/>
+            <a:r>
+              <a:rPr sz="1100" b="1">
+                <a:solidFill>
+                  <a:srgbClr val="5B3E83"/>
+                </a:solidFill>
+                <a:latin typeface="Bricolage Grotesque"/>
+              </a:rPr>
+              <a:t>marco</a:t>
+            </a:r>
+          </a:p>
+          <a:p>
+            <a:pPr algn="l"/>
+            <a:r>
+              <a:rPr sz="1000">
+                <a:solidFill>
+                  <a:srgbClr val="20242E"/>
+                </a:solidFill>
+                <a:latin typeface="Inter"/>
+              </a:rPr>
+              <a:t>Es pequeño, pero …</a:t>
+            </a:r>
+          </a:p>
+        </p:txBody>
+      </p:sp>
+      <p:sp>
+        <p:nvSpPr>
+          <p:cNvPr id="33" name="Tarjeta 11"/>
+          <p:cNvSpPr/>
+          <p:nvPr/>
+        </p:nvSpPr>
+        <p:spPr>
+          <a:xfrm>
+            <a:off x="9022842" y="4722876"/>
+            <a:ext cx="2708910" cy="898398"/>
+          </a:xfrm>
+          <a:prstGeom prst="roundRect">
+            <a:avLst>
+              <a:gd name="adj" fmla="val 6000"/>
+            </a:avLst>
+          </a:prstGeom>
+          <a:solidFill>
+            <a:srgbClr val="FFFFFF"/>
+          </a:solidFill>
+          <a:ln w="12700">
+            <a:solidFill>
+              <a:srgbClr val="E4E3DE"/>
+            </a:solidFill>
+          </a:ln>
+          <a:effectLst/>
+        </p:spPr>
+        <p:style>
+          <a:lnRef idx="1">
+            <a:schemeClr val="accent1"/>
+          </a:lnRef>
+          <a:fillRef idx="3">
+            <a:schemeClr val="accent1"/>
+          </a:fillRef>
+          <a:effectRef idx="2">
+            <a:schemeClr val="accent1"/>
+          </a:effectRef>
+          <a:fontRef idx="minor">
+            <a:schemeClr val="lt1"/>
+          </a:fontRef>
+        </p:style>
+        <p:txBody>
+          <a:bodyPr rtlCol="0" anchor="ctr"/>
+          <a:lstStyle/>
+          <a:p/>
+        </p:txBody>
+      </p:sp>
+      <p:sp>
+        <p:nvSpPr>
+          <p:cNvPr id="34" name="TarjetaTxt 11"/>
+          <p:cNvSpPr txBox="1"/>
+          <p:nvPr/>
+        </p:nvSpPr>
+        <p:spPr>
+          <a:xfrm>
+            <a:off x="9114282" y="4777740"/>
+            <a:ext cx="2526030" cy="788670"/>
+          </a:xfrm>
+          <a:prstGeom prst="rect">
+            <a:avLst/>
+          </a:prstGeom>
+          <a:noFill/>
+        </p:spPr>
+        <p:txBody>
+          <a:bodyPr wrap="square" anchor="t" lIns="45720" rIns="45720" tIns="27432" bIns="27432">
+            <a:normAutofit/>
+          </a:bodyPr>
+          <a:lstStyle/>
+          <a:p>
+            <a:pPr algn="l"/>
+            <a:r>
+              <a:rPr sz="1100" b="1">
+                <a:solidFill>
+                  <a:srgbClr val="5B3E83"/>
+                </a:solidFill>
+                <a:latin typeface="Bricolage Grotesque"/>
+              </a:rPr>
+              <a:t>marco</a:t>
+            </a:r>
+          </a:p>
+          <a:p>
+            <a:pPr algn="l"/>
+            <a:r>
+              <a:rPr sz="1000">
+                <a:solidFill>
+                  <a:srgbClr val="20242E"/>
+                </a:solidFill>
+                <a:latin typeface="Inter"/>
+              </a:rPr>
+              <a:t>No tiene …, aunque …</a:t>
+            </a:r>
+          </a:p>
+        </p:txBody>
+      </p:sp>
+      <p:sp>
+        <p:nvSpPr>
+          <p:cNvPr id="35" name="Tarjeta 12"/>
+          <p:cNvSpPr/>
+          <p:nvPr/>
+        </p:nvSpPr>
+        <p:spPr>
+          <a:xfrm>
+            <a:off x="457200" y="5749290"/>
+            <a:ext cx="2708910" cy="898398"/>
+          </a:xfrm>
+          <a:prstGeom prst="roundRect">
+            <a:avLst>
+              <a:gd name="adj" fmla="val 6000"/>
+            </a:avLst>
+          </a:prstGeom>
+          <a:solidFill>
+            <a:srgbClr val="FFFFFF"/>
+          </a:solidFill>
+          <a:ln w="12700">
+            <a:solidFill>
+              <a:srgbClr val="E4E3DE"/>
+            </a:solidFill>
+          </a:ln>
+          <a:effectLst/>
+        </p:spPr>
+        <p:style>
+          <a:lnRef idx="1">
+            <a:schemeClr val="accent1"/>
+          </a:lnRef>
+          <a:fillRef idx="3">
+            <a:schemeClr val="accent1"/>
+          </a:fillRef>
+          <a:effectRef idx="2">
+            <a:schemeClr val="accent1"/>
+          </a:effectRef>
+          <a:fontRef idx="minor">
+            <a:schemeClr val="lt1"/>
+          </a:fontRef>
+        </p:style>
+        <p:txBody>
+          <a:bodyPr rtlCol="0" anchor="ctr"/>
+          <a:lstStyle/>
+          <a:p/>
+        </p:txBody>
+      </p:sp>
+      <p:sp>
+        <p:nvSpPr>
+          <p:cNvPr id="36" name="TarjetaTxt 12"/>
+          <p:cNvSpPr txBox="1"/>
+          <p:nvPr/>
+        </p:nvSpPr>
+        <p:spPr>
+          <a:xfrm>
+            <a:off x="548640" y="5804154"/>
+            <a:ext cx="2526030" cy="788670"/>
+          </a:xfrm>
+          <a:prstGeom prst="rect">
+            <a:avLst/>
+          </a:prstGeom>
+          <a:noFill/>
+        </p:spPr>
+        <p:txBody>
+          <a:bodyPr wrap="square" anchor="t" lIns="45720" rIns="45720" tIns="27432" bIns="27432">
+            <a:normAutofit/>
+          </a:bodyPr>
+          <a:lstStyle/>
+          <a:p>
+            <a:pPr algn="l"/>
+            <a:r>
+              <a:rPr sz="1100" b="1">
+                <a:solidFill>
+                  <a:srgbClr val="5B3E83"/>
+                </a:solidFill>
+                <a:latin typeface="Bricolage Grotesque"/>
+              </a:rPr>
+              <a:t>marco</a:t>
+            </a:r>
+          </a:p>
+          <a:p>
+            <a:pPr algn="l"/>
+            <a:r>
+              <a:rPr sz="1000">
+                <a:solidFill>
+                  <a:srgbClr val="20242E"/>
+                </a:solidFill>
+                <a:latin typeface="Inter"/>
+              </a:rPr>
+              <a:t>Está en …, así que …</a:t>
+            </a:r>
+          </a:p>
+        </p:txBody>
+      </p:sp>
+      <p:sp>
+        <p:nvSpPr>
+          <p:cNvPr id="37" name="Tarjeta 13"/>
+          <p:cNvSpPr/>
+          <p:nvPr/>
+        </p:nvSpPr>
+        <p:spPr>
+          <a:xfrm>
+            <a:off x="3312414" y="5749290"/>
+            <a:ext cx="2708910" cy="898398"/>
+          </a:xfrm>
+          <a:prstGeom prst="roundRect">
+            <a:avLst>
+              <a:gd name="adj" fmla="val 6000"/>
+            </a:avLst>
+          </a:prstGeom>
+          <a:solidFill>
+            <a:srgbClr val="FFFFFF"/>
+          </a:solidFill>
+          <a:ln w="12700">
+            <a:solidFill>
+              <a:srgbClr val="E4E3DE"/>
+            </a:solidFill>
+          </a:ln>
+          <a:effectLst/>
+        </p:spPr>
+        <p:style>
+          <a:lnRef idx="1">
+            <a:schemeClr val="accent1"/>
+          </a:lnRef>
+          <a:fillRef idx="3">
+            <a:schemeClr val="accent1"/>
+          </a:fillRef>
+          <a:effectRef idx="2">
+            <a:schemeClr val="accent1"/>
+          </a:effectRef>
+          <a:fontRef idx="minor">
+            <a:schemeClr val="lt1"/>
+          </a:fontRef>
+        </p:style>
+        <p:txBody>
+          <a:bodyPr rtlCol="0" anchor="ctr"/>
+          <a:lstStyle/>
+          <a:p/>
+        </p:txBody>
+      </p:sp>
+      <p:sp>
+        <p:nvSpPr>
+          <p:cNvPr id="38" name="TarjetaTxt 13"/>
+          <p:cNvSpPr txBox="1"/>
+          <p:nvPr/>
+        </p:nvSpPr>
+        <p:spPr>
+          <a:xfrm>
+            <a:off x="3403854" y="5804154"/>
+            <a:ext cx="2526030" cy="788670"/>
+          </a:xfrm>
+          <a:prstGeom prst="rect">
+            <a:avLst/>
+          </a:prstGeom>
+          <a:noFill/>
+        </p:spPr>
+        <p:txBody>
+          <a:bodyPr wrap="square" anchor="t" lIns="45720" rIns="45720" tIns="27432" bIns="27432">
+            <a:normAutofit/>
+          </a:bodyPr>
+          <a:lstStyle/>
+          <a:p>
+            <a:pPr algn="l"/>
+            <a:r>
+              <a:rPr sz="1100" b="1">
+                <a:solidFill>
+                  <a:srgbClr val="5B3E83"/>
+                </a:solidFill>
+                <a:latin typeface="Bricolage Grotesque"/>
+              </a:rPr>
+              <a:t>marco</a:t>
+            </a:r>
+          </a:p>
+          <a:p>
+            <a:pPr algn="l"/>
+            <a:r>
+              <a:rPr sz="1000">
+                <a:solidFill>
+                  <a:srgbClr val="20242E"/>
+                </a:solidFill>
+                <a:latin typeface="Inter"/>
+              </a:rPr>
+              <a:t>Ideal para quien …</a:t>
+            </a:r>
+          </a:p>
+        </p:txBody>
+      </p:sp>
+      <p:sp>
+        <p:nvSpPr>
+          <p:cNvPr id="39" name="Tarjeta 14"/>
+          <p:cNvSpPr/>
+          <p:nvPr/>
+        </p:nvSpPr>
+        <p:spPr>
+          <a:xfrm>
+            <a:off x="6167628" y="5749290"/>
+            <a:ext cx="2708910" cy="898398"/>
+          </a:xfrm>
+          <a:prstGeom prst="roundRect">
+            <a:avLst>
+              <a:gd name="adj" fmla="val 6000"/>
+            </a:avLst>
+          </a:prstGeom>
+          <a:solidFill>
+            <a:srgbClr val="FFFFFF"/>
+          </a:solidFill>
+          <a:ln w="12700">
+            <a:solidFill>
+              <a:srgbClr val="E4E3DE"/>
+            </a:solidFill>
+          </a:ln>
+          <a:effectLst/>
+        </p:spPr>
+        <p:style>
+          <a:lnRef idx="1">
+            <a:schemeClr val="accent1"/>
+          </a:lnRef>
+          <a:fillRef idx="3">
+            <a:schemeClr val="accent1"/>
+          </a:fillRef>
+          <a:effectRef idx="2">
+            <a:schemeClr val="accent1"/>
+          </a:effectRef>
+          <a:fontRef idx="minor">
+            <a:schemeClr val="lt1"/>
+          </a:fontRef>
+        </p:style>
+        <p:txBody>
+          <a:bodyPr rtlCol="0" anchor="ctr"/>
+          <a:lstStyle/>
+          <a:p/>
+        </p:txBody>
+      </p:sp>
+      <p:sp>
+        <p:nvSpPr>
+          <p:cNvPr id="40" name="TarjetaTxt 14"/>
+          <p:cNvSpPr txBox="1"/>
+          <p:nvPr/>
+        </p:nvSpPr>
+        <p:spPr>
+          <a:xfrm>
+            <a:off x="6259068" y="5804154"/>
+            <a:ext cx="2526030" cy="788670"/>
+          </a:xfrm>
+          <a:prstGeom prst="rect">
+            <a:avLst/>
+          </a:prstGeom>
+          <a:noFill/>
+        </p:spPr>
+        <p:txBody>
+          <a:bodyPr wrap="square" anchor="t" lIns="45720" rIns="45720" tIns="27432" bIns="27432">
+            <a:normAutofit/>
+          </a:bodyPr>
+          <a:lstStyle/>
+          <a:p>
+            <a:pPr algn="l"/>
+            <a:r>
+              <a:rPr sz="1100" b="1">
+                <a:solidFill>
+                  <a:srgbClr val="5B3E83"/>
+                </a:solidFill>
+                <a:latin typeface="Bricolage Grotesque"/>
+              </a:rPr>
+              <a:t>marco</a:t>
+            </a:r>
+          </a:p>
+          <a:p>
+            <a:pPr algn="l"/>
+            <a:r>
+              <a:rPr sz="1000">
+                <a:solidFill>
+                  <a:srgbClr val="20242E"/>
+                </a:solidFill>
+                <a:latin typeface="Inter"/>
+              </a:rPr>
+              <a:t>Lo mejor: …</a:t>
+            </a:r>
+          </a:p>
+        </p:txBody>
+      </p:sp>
+    </p:spTree>
+  </p:cSld>
+  <p:clrMapOvr>
+    <a:masterClrMapping/>
+  </p:clrMapOvr>
+</p:sld>
+</file>
+
+<file path=ppt/slides/slide23.xml><?xml version="1.0" encoding="utf-8"?>
+<p:sld xmlns:a="http://schemas.openxmlformats.org/drawingml/2006/main" xmlns:p="http://schemas.openxmlformats.org/presentationml/2006/main" xmlns:r="http://schemas.openxmlformats.org/officeDocument/2006/relationships">
+  <p:cSld>
+    <p:spTree>
+      <p:nvGrpSpPr>
+        <p:cNvPr id="1" name=""/>
+        <p:cNvGrpSpPr/>
+        <p:nvPr/>
+      </p:nvGrpSpPr>
+      <p:grpSpPr/>
+      <p:sp>
+        <p:nvSpPr>
+          <p:cNvPr id="2" name="Fondo"/>
+          <p:cNvSpPr/>
+          <p:nvPr/>
+        </p:nvSpPr>
+        <p:spPr>
+          <a:xfrm>
+            <a:off x="0" y="0"/>
+            <a:ext cx="12191695" cy="6858000"/>
+          </a:xfrm>
+          <a:prstGeom prst="rect">
+            <a:avLst/>
+          </a:prstGeom>
+          <a:solidFill>
+            <a:srgbClr val="FCFBF8"/>
+          </a:solidFill>
+          <a:ln>
+            <a:noFill/>
+          </a:ln>
+          <a:effectLst/>
+        </p:spPr>
+        <p:style>
+          <a:lnRef idx="1">
+            <a:schemeClr val="accent1"/>
+          </a:lnRef>
+          <a:fillRef idx="3">
+            <a:schemeClr val="accent1"/>
+          </a:fillRef>
+          <a:effectRef idx="2">
+            <a:schemeClr val="accent1"/>
+          </a:effectRef>
+          <a:fontRef idx="minor">
+            <a:schemeClr val="lt1"/>
+          </a:fontRef>
+        </p:style>
+        <p:txBody>
+          <a:bodyPr rtlCol="0" anchor="ctr"/>
+          <a:lstStyle/>
+          <a:p/>
+        </p:txBody>
+      </p:sp>
+      <p:sp>
+        <p:nvSpPr>
+          <p:cNvPr id="3" name="Cabecera"/>
+          <p:cNvSpPr/>
+          <p:nvPr/>
+        </p:nvSpPr>
+        <p:spPr>
+          <a:xfrm>
+            <a:off x="0" y="0"/>
+            <a:ext cx="12191695" cy="1078992"/>
+          </a:xfrm>
+          <a:prstGeom prst="rect">
+            <a:avLst/>
+          </a:prstGeom>
+          <a:solidFill>
+            <a:srgbClr val="7C56A9"/>
+          </a:solidFill>
+          <a:ln>
+            <a:noFill/>
+          </a:ln>
+          <a:effectLst/>
+        </p:spPr>
+        <p:style>
+          <a:lnRef idx="1">
+            <a:schemeClr val="accent1"/>
+          </a:lnRef>
+          <a:fillRef idx="3">
+            <a:schemeClr val="accent1"/>
+          </a:fillRef>
+          <a:effectRef idx="2">
+            <a:schemeClr val="accent1"/>
+          </a:effectRef>
+          <a:fontRef idx="minor">
+            <a:schemeClr val="lt1"/>
+          </a:fontRef>
+        </p:style>
+        <p:txBody>
+          <a:bodyPr rtlCol="0" anchor="ctr"/>
+          <a:lstStyle/>
+          <a:p/>
+        </p:txBody>
+      </p:sp>
+      <p:sp>
+        <p:nvSpPr>
+          <p:cNvPr id="4" name="Chip"/>
+          <p:cNvSpPr/>
+          <p:nvPr/>
+        </p:nvSpPr>
+        <p:spPr>
+          <a:xfrm>
+            <a:off x="457200" y="182880"/>
+            <a:ext cx="3017520" cy="292608"/>
+          </a:xfrm>
+          <a:prstGeom prst="roundRect">
+            <a:avLst>
+              <a:gd name="adj" fmla="val 50000"/>
+            </a:avLst>
+          </a:prstGeom>
+          <a:solidFill>
+            <a:srgbClr val="FFFFFF"/>
+          </a:solidFill>
+          <a:ln>
+            <a:noFill/>
+          </a:ln>
+          <a:effectLst/>
+        </p:spPr>
+        <p:style>
+          <a:lnRef idx="1">
+            <a:schemeClr val="accent1"/>
+          </a:lnRef>
+          <a:fillRef idx="3">
+            <a:schemeClr val="accent1"/>
+          </a:fillRef>
+          <a:effectRef idx="2">
+            <a:schemeClr val="accent1"/>
+          </a:effectRef>
+          <a:fontRef idx="minor">
+            <a:schemeClr val="lt1"/>
+          </a:fontRef>
+        </p:style>
+        <p:txBody>
+          <a:bodyPr rtlCol="0" anchor="ctr"/>
+          <a:lstStyle/>
+          <a:p/>
+        </p:txBody>
+      </p:sp>
+      <p:sp>
+        <p:nvSpPr>
+          <p:cNvPr id="5" name="ChipTxt"/>
+          <p:cNvSpPr txBox="1"/>
+          <p:nvPr/>
+        </p:nvSpPr>
+        <p:spPr>
+          <a:xfrm>
+            <a:off x="457200" y="173736"/>
+            <a:ext cx="3017520" cy="310896"/>
+          </a:xfrm>
+          <a:prstGeom prst="rect">
+            <a:avLst/>
+          </a:prstGeom>
+          <a:noFill/>
+        </p:spPr>
+        <p:txBody>
+          <a:bodyPr wrap="square" anchor="ctr" lIns="45720" rIns="45720" tIns="27432" bIns="27432">
+            <a:normAutofit/>
+          </a:bodyPr>
+          <a:lstStyle/>
+          <a:p>
+            <a:pPr algn="ctr"/>
+            <a:r>
+              <a:rPr sz="950" b="1">
+                <a:solidFill>
+                  <a:srgbClr val="5B3E83"/>
+                </a:solidFill>
+                <a:latin typeface="Inter"/>
+              </a:rPr>
+              <a:t>RETO 5 · ONDERHANDELING &amp; DILEMMA</a:t>
+            </a:r>
+          </a:p>
+        </p:txBody>
+      </p:sp>
+      <p:sp>
+        <p:nvSpPr>
+          <p:cNvPr id="6" name="Titulo"/>
+          <p:cNvSpPr txBox="1"/>
+          <p:nvPr/>
+        </p:nvSpPr>
+        <p:spPr>
+          <a:xfrm>
+            <a:off x="457200" y="502920"/>
+            <a:ext cx="8412480" cy="475488"/>
+          </a:xfrm>
+          <a:prstGeom prst="rect">
+            <a:avLst/>
+          </a:prstGeom>
+          <a:noFill/>
+        </p:spPr>
+        <p:txBody>
+          <a:bodyPr wrap="square" anchor="t" lIns="45720" rIns="45720" tIns="27432" bIns="27432">
+            <a:normAutofit/>
+          </a:bodyPr>
+          <a:lstStyle/>
+          <a:p>
+            <a:pPr algn="l"/>
+            <a:r>
+              <a:rPr sz="2700" b="1">
+                <a:solidFill>
+                  <a:srgbClr val="FFFFFF"/>
+                </a:solidFill>
+                <a:latin typeface="Bricolage Grotesque"/>
+              </a:rPr>
+              <a:t>Reforma con 500 €</a:t>
+            </a:r>
+          </a:p>
+        </p:txBody>
+      </p:sp>
+      <p:sp>
+        <p:nvSpPr>
+          <p:cNvPr id="7" name="Badges"/>
+          <p:cNvSpPr txBox="1"/>
+          <p:nvPr/>
+        </p:nvSpPr>
+        <p:spPr>
+          <a:xfrm>
+            <a:off x="9052560" y="256032"/>
+            <a:ext cx="2651760" cy="640080"/>
+          </a:xfrm>
+          <a:prstGeom prst="rect">
+            <a:avLst/>
+          </a:prstGeom>
+          <a:noFill/>
+        </p:spPr>
+        <p:txBody>
+          <a:bodyPr wrap="square" anchor="t" lIns="45720" rIns="45720" tIns="27432" bIns="27432">
+            <a:normAutofit/>
+          </a:bodyPr>
+          <a:lstStyle/>
+          <a:p>
+            <a:pPr algn="r"/>
+            <a:r>
+              <a:rPr sz="1000">
+                <a:solidFill>
+                  <a:srgbClr val="EEE8F5"/>
+                </a:solidFill>
+                <a:latin typeface="Inter"/>
+              </a:rPr>
+              <a:t>👨‍👩‍👧 En grupos</a:t>
+            </a:r>
+          </a:p>
+          <a:p>
+            <a:pPr algn="r"/>
+            <a:r>
+              <a:rPr sz="1000">
+                <a:solidFill>
+                  <a:srgbClr val="EEE8F5"/>
+                </a:solidFill>
+                <a:latin typeface="Inter"/>
+              </a:rPr>
+              <a:t>± 18 min · ★★★</a:t>
+            </a:r>
+          </a:p>
+        </p:txBody>
+      </p:sp>
+      <p:sp>
+        <p:nvSpPr>
+          <p:cNvPr id="8" name="Gancho"/>
+          <p:cNvSpPr txBox="1"/>
+          <p:nvPr/>
+        </p:nvSpPr>
+        <p:spPr>
+          <a:xfrm>
+            <a:off x="457200" y="1225296"/>
+            <a:ext cx="11274552" cy="566928"/>
+          </a:xfrm>
+          <a:prstGeom prst="rect">
+            <a:avLst/>
+          </a:prstGeom>
+          <a:noFill/>
+        </p:spPr>
+        <p:txBody>
+          <a:bodyPr wrap="square" anchor="t" lIns="45720" rIns="45720" tIns="27432" bIns="27432">
+            <a:normAutofit/>
+          </a:bodyPr>
+          <a:lstStyle/>
+          <a:p>
+            <a:pPr algn="l"/>
+            <a:r>
+              <a:rPr sz="1600" b="1">
+                <a:solidFill>
+                  <a:srgbClr val="5B3E83"/>
+                </a:solidFill>
+                <a:latin typeface="Bricolage Grotesque"/>
+              </a:rPr>
+              <a:t>Quinientos euros, una habitación fea y cuatro opiniones.</a:t>
+            </a:r>
+          </a:p>
+          <a:p>
+            <a:pPr algn="l"/>
+            <a:r>
+              <a:rPr sz="1100" i="1">
+                <a:solidFill>
+                  <a:srgbClr val="6A6E78"/>
+                </a:solidFill>
+                <a:latin typeface="Inter"/>
+              </a:rPr>
+              <a:t>Vijfhonderd euro, een lelijke kamer en vier meningen.</a:t>
+            </a:r>
+          </a:p>
+        </p:txBody>
+      </p:sp>
+      <p:sp>
+        <p:nvSpPr>
+          <p:cNvPr id="9" name="ReglaCaja"/>
+          <p:cNvSpPr/>
+          <p:nvPr/>
+        </p:nvSpPr>
+        <p:spPr>
+          <a:xfrm>
+            <a:off x="457200" y="1847088"/>
+            <a:ext cx="11274552" cy="658368"/>
+          </a:xfrm>
+          <a:prstGeom prst="roundRect">
+            <a:avLst>
+              <a:gd name="adj" fmla="val 5000"/>
+            </a:avLst>
+          </a:prstGeom>
+          <a:solidFill>
+            <a:srgbClr val="FBF3D6"/>
+          </a:solidFill>
+          <a:ln>
+            <a:noFill/>
+          </a:ln>
+          <a:effectLst/>
+        </p:spPr>
+        <p:style>
+          <a:lnRef idx="1">
+            <a:schemeClr val="accent1"/>
+          </a:lnRef>
+          <a:fillRef idx="3">
+            <a:schemeClr val="accent1"/>
+          </a:fillRef>
+          <a:effectRef idx="2">
+            <a:schemeClr val="accent1"/>
+          </a:effectRef>
+          <a:fontRef idx="minor">
+            <a:schemeClr val="lt1"/>
+          </a:fontRef>
+        </p:style>
+        <p:txBody>
+          <a:bodyPr rtlCol="0" anchor="ctr"/>
+          <a:lstStyle/>
+          <a:p/>
+        </p:txBody>
+      </p:sp>
+      <p:sp>
+        <p:nvSpPr>
+          <p:cNvPr id="10" name="ReglaTxt"/>
+          <p:cNvSpPr txBox="1"/>
+          <p:nvPr/>
+        </p:nvSpPr>
+        <p:spPr>
+          <a:xfrm>
+            <a:off x="603504" y="1883664"/>
+            <a:ext cx="10972800" cy="585216"/>
+          </a:xfrm>
+          <a:prstGeom prst="rect">
+            <a:avLst/>
+          </a:prstGeom>
+          <a:noFill/>
+        </p:spPr>
+        <p:txBody>
+          <a:bodyPr wrap="square" anchor="t" lIns="45720" rIns="45720" tIns="27432" bIns="27432">
+            <a:normAutofit/>
+          </a:bodyPr>
+          <a:lstStyle/>
+          <a:p>
+            <a:pPr algn="l"/>
+            <a:r>
+              <a:rPr sz="850" b="1">
+                <a:solidFill>
+                  <a:srgbClr val="B7860B"/>
+                </a:solidFill>
+                <a:latin typeface="Inter"/>
+              </a:rPr>
+              <a:t>LA REGLA DEL RETO</a:t>
+            </a:r>
+          </a:p>
+          <a:p>
+            <a:pPr algn="l"/>
+            <a:r>
+              <a:rPr sz="1100">
+                <a:solidFill>
+                  <a:srgbClr val="20242E"/>
+                </a:solidFill>
+                <a:latin typeface="Inter"/>
+              </a:rPr>
+              <a:t>Vijfhonderd euro, geen cent meer. En elke aankoop wordt verdedigd met een plaatsbepaling: «la estantería, encima del escritorio, porque…». Zonder plaats telt het voorstel niet.</a:t>
+            </a:r>
+          </a:p>
+        </p:txBody>
+      </p:sp>
+      <p:sp>
+        <p:nvSpPr>
+          <p:cNvPr id="11" name="Tarjeta 0"/>
+          <p:cNvSpPr/>
+          <p:nvPr/>
+        </p:nvSpPr>
+        <p:spPr>
+          <a:xfrm>
+            <a:off x="457200" y="2670048"/>
+            <a:ext cx="2708910" cy="1170432"/>
+          </a:xfrm>
+          <a:prstGeom prst="roundRect">
+            <a:avLst>
+              <a:gd name="adj" fmla="val 6000"/>
+            </a:avLst>
+          </a:prstGeom>
+          <a:solidFill>
+            <a:srgbClr val="FFFFFF"/>
+          </a:solidFill>
+          <a:ln w="12700">
+            <a:solidFill>
+              <a:srgbClr val="E4E3DE"/>
+            </a:solidFill>
+          </a:ln>
+          <a:effectLst/>
+        </p:spPr>
+        <p:style>
+          <a:lnRef idx="1">
+            <a:schemeClr val="accent1"/>
+          </a:lnRef>
+          <a:fillRef idx="3">
+            <a:schemeClr val="accent1"/>
+          </a:fillRef>
+          <a:effectRef idx="2">
+            <a:schemeClr val="accent1"/>
+          </a:effectRef>
+          <a:fontRef idx="minor">
+            <a:schemeClr val="lt1"/>
+          </a:fontRef>
+        </p:style>
+        <p:txBody>
+          <a:bodyPr rtlCol="0" anchor="ctr"/>
+          <a:lstStyle/>
+          <a:p/>
+        </p:txBody>
+      </p:sp>
+      <p:sp>
+        <p:nvSpPr>
+          <p:cNvPr id="12" name="TarjetaTxt 0"/>
+          <p:cNvSpPr txBox="1"/>
+          <p:nvPr/>
+        </p:nvSpPr>
+        <p:spPr>
+          <a:xfrm>
+            <a:off x="548640" y="2724912"/>
+            <a:ext cx="2526030" cy="1060704"/>
+          </a:xfrm>
+          <a:prstGeom prst="rect">
+            <a:avLst/>
+          </a:prstGeom>
+          <a:noFill/>
+        </p:spPr>
+        <p:txBody>
+          <a:bodyPr wrap="square" anchor="t" lIns="45720" rIns="45720" tIns="27432" bIns="27432">
+            <a:normAutofit/>
+          </a:bodyPr>
+          <a:lstStyle/>
+          <a:p>
+            <a:pPr algn="l"/>
+            <a:r>
+              <a:rPr sz="1100" b="1">
+                <a:solidFill>
+                  <a:srgbClr val="5B3E83"/>
+                </a:solidFill>
+                <a:latin typeface="Bricolage Grotesque"/>
+              </a:rPr>
+              <a:t>La habitación</a:t>
+            </a:r>
+          </a:p>
+          <a:p>
+            <a:pPr algn="l"/>
+            <a:r>
+              <a:rPr sz="1000">
+                <a:solidFill>
+                  <a:srgbClr val="20242E"/>
+                </a:solidFill>
+                <a:latin typeface="Inter"/>
+              </a:rPr>
+              <a:t>Doce metros cuadrados. Paredes blancas, una ventana pequeña, una cama y nada más.</a:t>
+            </a:r>
+          </a:p>
+        </p:txBody>
+      </p:sp>
+      <p:sp>
+        <p:nvSpPr>
+          <p:cNvPr id="13" name="Tarjeta 1"/>
+          <p:cNvSpPr/>
+          <p:nvPr/>
+        </p:nvSpPr>
+        <p:spPr>
+          <a:xfrm>
+            <a:off x="3312414" y="2670048"/>
+            <a:ext cx="2708910" cy="1170432"/>
+          </a:xfrm>
+          <a:prstGeom prst="roundRect">
+            <a:avLst>
+              <a:gd name="adj" fmla="val 6000"/>
+            </a:avLst>
+          </a:prstGeom>
+          <a:solidFill>
+            <a:srgbClr val="FFFFFF"/>
+          </a:solidFill>
+          <a:ln w="12700">
+            <a:solidFill>
+              <a:srgbClr val="E4E3DE"/>
+            </a:solidFill>
+          </a:ln>
+          <a:effectLst/>
+        </p:spPr>
+        <p:style>
+          <a:lnRef idx="1">
+            <a:schemeClr val="accent1"/>
+          </a:lnRef>
+          <a:fillRef idx="3">
+            <a:schemeClr val="accent1"/>
+          </a:fillRef>
+          <a:effectRef idx="2">
+            <a:schemeClr val="accent1"/>
+          </a:effectRef>
+          <a:fontRef idx="minor">
+            <a:schemeClr val="lt1"/>
+          </a:fontRef>
+        </p:style>
+        <p:txBody>
+          <a:bodyPr rtlCol="0" anchor="ctr"/>
+          <a:lstStyle/>
+          <a:p/>
+        </p:txBody>
+      </p:sp>
+      <p:sp>
+        <p:nvSpPr>
+          <p:cNvPr id="14" name="TarjetaTxt 1"/>
+          <p:cNvSpPr txBox="1"/>
+          <p:nvPr/>
+        </p:nvSpPr>
+        <p:spPr>
+          <a:xfrm>
+            <a:off x="3403854" y="2724912"/>
+            <a:ext cx="2526030" cy="1060704"/>
+          </a:xfrm>
+          <a:prstGeom prst="rect">
+            <a:avLst/>
+          </a:prstGeom>
+          <a:noFill/>
+        </p:spPr>
+        <p:txBody>
+          <a:bodyPr wrap="square" anchor="t" lIns="45720" rIns="45720" tIns="27432" bIns="27432">
+            <a:normAutofit/>
+          </a:bodyPr>
+          <a:lstStyle/>
+          <a:p>
+            <a:pPr algn="l"/>
+            <a:r>
+              <a:rPr sz="1100" b="1">
+                <a:solidFill>
+                  <a:srgbClr val="5B3E83"/>
+                </a:solidFill>
+                <a:latin typeface="Bricolage Grotesque"/>
+              </a:rPr>
+              <a:t>Precios</a:t>
+            </a:r>
+          </a:p>
+          <a:p>
+            <a:pPr algn="l"/>
+            <a:r>
+              <a:rPr sz="1000">
+                <a:solidFill>
+                  <a:srgbClr val="20242E"/>
+                </a:solidFill>
+                <a:latin typeface="Inter"/>
+              </a:rPr>
+              <a:t>una estantería (60 €) · un escritorio (120 €) · una silla de escritorio (90 €)</a:t>
+            </a:r>
+          </a:p>
+        </p:txBody>
+      </p:sp>
+      <p:sp>
+        <p:nvSpPr>
+          <p:cNvPr id="15" name="Tarjeta 2"/>
+          <p:cNvSpPr/>
+          <p:nvPr/>
+        </p:nvSpPr>
+        <p:spPr>
+          <a:xfrm>
+            <a:off x="6167628" y="2670048"/>
+            <a:ext cx="2708910" cy="1170432"/>
+          </a:xfrm>
+          <a:prstGeom prst="roundRect">
+            <a:avLst>
+              <a:gd name="adj" fmla="val 6000"/>
+            </a:avLst>
+          </a:prstGeom>
+          <a:solidFill>
+            <a:srgbClr val="FFFFFF"/>
+          </a:solidFill>
+          <a:ln w="12700">
+            <a:solidFill>
+              <a:srgbClr val="E4E3DE"/>
+            </a:solidFill>
+          </a:ln>
+          <a:effectLst/>
+        </p:spPr>
+        <p:style>
+          <a:lnRef idx="1">
+            <a:schemeClr val="accent1"/>
+          </a:lnRef>
+          <a:fillRef idx="3">
+            <a:schemeClr val="accent1"/>
+          </a:fillRef>
+          <a:effectRef idx="2">
+            <a:schemeClr val="accent1"/>
+          </a:effectRef>
+          <a:fontRef idx="minor">
+            <a:schemeClr val="lt1"/>
+          </a:fontRef>
+        </p:style>
+        <p:txBody>
+          <a:bodyPr rtlCol="0" anchor="ctr"/>
+          <a:lstStyle/>
+          <a:p/>
+        </p:txBody>
+      </p:sp>
+      <p:sp>
+        <p:nvSpPr>
+          <p:cNvPr id="16" name="TarjetaTxt 2"/>
+          <p:cNvSpPr txBox="1"/>
+          <p:nvPr/>
+        </p:nvSpPr>
+        <p:spPr>
+          <a:xfrm>
+            <a:off x="6259068" y="2724912"/>
+            <a:ext cx="2526030" cy="1060704"/>
+          </a:xfrm>
+          <a:prstGeom prst="rect">
+            <a:avLst/>
+          </a:prstGeom>
+          <a:noFill/>
+        </p:spPr>
+        <p:txBody>
+          <a:bodyPr wrap="square" anchor="t" lIns="45720" rIns="45720" tIns="27432" bIns="27432">
+            <a:normAutofit/>
+          </a:bodyPr>
+          <a:lstStyle/>
+          <a:p>
+            <a:pPr algn="l"/>
+            <a:r>
+              <a:rPr sz="1100" b="1">
+                <a:solidFill>
+                  <a:srgbClr val="5B3E83"/>
+                </a:solidFill>
+                <a:latin typeface="Bricolage Grotesque"/>
+              </a:rPr>
+              <a:t>Precios</a:t>
+            </a:r>
+          </a:p>
+          <a:p>
+            <a:pPr algn="l"/>
+            <a:r>
+              <a:rPr sz="1000">
+                <a:solidFill>
+                  <a:srgbClr val="20242E"/>
+                </a:solidFill>
+                <a:latin typeface="Inter"/>
+              </a:rPr>
+              <a:t>una lámpara de pie (45 €) · una alfombra (55 €) · cortinas (35 €)</a:t>
+            </a:r>
+          </a:p>
+        </p:txBody>
+      </p:sp>
+      <p:sp>
+        <p:nvSpPr>
+          <p:cNvPr id="17" name="Tarjeta 3"/>
+          <p:cNvSpPr/>
+          <p:nvPr/>
+        </p:nvSpPr>
+        <p:spPr>
+          <a:xfrm>
+            <a:off x="9022842" y="2670048"/>
+            <a:ext cx="2708910" cy="1170432"/>
+          </a:xfrm>
+          <a:prstGeom prst="roundRect">
+            <a:avLst>
+              <a:gd name="adj" fmla="val 6000"/>
+            </a:avLst>
+          </a:prstGeom>
+          <a:solidFill>
+            <a:srgbClr val="FFFFFF"/>
+          </a:solidFill>
+          <a:ln w="12700">
+            <a:solidFill>
+              <a:srgbClr val="E4E3DE"/>
+            </a:solidFill>
+          </a:ln>
+          <a:effectLst/>
+        </p:spPr>
+        <p:style>
+          <a:lnRef idx="1">
+            <a:schemeClr val="accent1"/>
+          </a:lnRef>
+          <a:fillRef idx="3">
+            <a:schemeClr val="accent1"/>
+          </a:fillRef>
+          <a:effectRef idx="2">
+            <a:schemeClr val="accent1"/>
+          </a:effectRef>
+          <a:fontRef idx="minor">
+            <a:schemeClr val="lt1"/>
+          </a:fontRef>
+        </p:style>
+        <p:txBody>
+          <a:bodyPr rtlCol="0" anchor="ctr"/>
+          <a:lstStyle/>
+          <a:p/>
+        </p:txBody>
+      </p:sp>
+      <p:sp>
+        <p:nvSpPr>
+          <p:cNvPr id="18" name="TarjetaTxt 3"/>
+          <p:cNvSpPr txBox="1"/>
+          <p:nvPr/>
+        </p:nvSpPr>
+        <p:spPr>
+          <a:xfrm>
+            <a:off x="9114282" y="2724912"/>
+            <a:ext cx="2526030" cy="1060704"/>
+          </a:xfrm>
+          <a:prstGeom prst="rect">
+            <a:avLst/>
+          </a:prstGeom>
+          <a:noFill/>
+        </p:spPr>
+        <p:txBody>
+          <a:bodyPr wrap="square" anchor="t" lIns="45720" rIns="45720" tIns="27432" bIns="27432">
+            <a:normAutofit/>
+          </a:bodyPr>
+          <a:lstStyle/>
+          <a:p>
+            <a:pPr algn="l"/>
+            <a:r>
+              <a:rPr sz="1100" b="1">
+                <a:solidFill>
+                  <a:srgbClr val="5B3E83"/>
+                </a:solidFill>
+                <a:latin typeface="Bricolage Grotesque"/>
+              </a:rPr>
+              <a:t>Precios</a:t>
+            </a:r>
+          </a:p>
+          <a:p>
+            <a:pPr algn="l"/>
+            <a:r>
+              <a:rPr sz="1000">
+                <a:solidFill>
+                  <a:srgbClr val="20242E"/>
+                </a:solidFill>
+                <a:latin typeface="Inter"/>
+              </a:rPr>
+              <a:t>pintura para una pared (40 €) · un espejo grande (70 €) · plantas (25 €)</a:t>
+            </a:r>
+          </a:p>
+        </p:txBody>
+      </p:sp>
+      <p:sp>
+        <p:nvSpPr>
+          <p:cNvPr id="19" name="Tarjeta 4"/>
+          <p:cNvSpPr/>
+          <p:nvPr/>
+        </p:nvSpPr>
+        <p:spPr>
+          <a:xfrm>
+            <a:off x="457200" y="3968496"/>
+            <a:ext cx="2708910" cy="1170432"/>
+          </a:xfrm>
+          <a:prstGeom prst="roundRect">
+            <a:avLst>
+              <a:gd name="adj" fmla="val 6000"/>
+            </a:avLst>
+          </a:prstGeom>
+          <a:solidFill>
+            <a:srgbClr val="FFFFFF"/>
+          </a:solidFill>
+          <a:ln w="12700">
+            <a:solidFill>
+              <a:srgbClr val="E4E3DE"/>
+            </a:solidFill>
+          </a:ln>
+          <a:effectLst/>
+        </p:spPr>
+        <p:style>
+          <a:lnRef idx="1">
+            <a:schemeClr val="accent1"/>
+          </a:lnRef>
+          <a:fillRef idx="3">
+            <a:schemeClr val="accent1"/>
+          </a:fillRef>
+          <a:effectRef idx="2">
+            <a:schemeClr val="accent1"/>
+          </a:effectRef>
+          <a:fontRef idx="minor">
+            <a:schemeClr val="lt1"/>
+          </a:fontRef>
+        </p:style>
+        <p:txBody>
+          <a:bodyPr rtlCol="0" anchor="ctr"/>
+          <a:lstStyle/>
+          <a:p/>
+        </p:txBody>
+      </p:sp>
+      <p:sp>
+        <p:nvSpPr>
+          <p:cNvPr id="20" name="TarjetaTxt 4"/>
+          <p:cNvSpPr txBox="1"/>
+          <p:nvPr/>
+        </p:nvSpPr>
+        <p:spPr>
+          <a:xfrm>
+            <a:off x="548640" y="4023360"/>
+            <a:ext cx="2526030" cy="1060704"/>
+          </a:xfrm>
+          <a:prstGeom prst="rect">
+            <a:avLst/>
+          </a:prstGeom>
+          <a:noFill/>
+        </p:spPr>
+        <p:txBody>
+          <a:bodyPr wrap="square" anchor="t" lIns="45720" rIns="45720" tIns="27432" bIns="27432">
+            <a:normAutofit/>
+          </a:bodyPr>
+          <a:lstStyle/>
+          <a:p>
+            <a:pPr algn="l"/>
+            <a:r>
+              <a:rPr sz="1100" b="1">
+                <a:solidFill>
+                  <a:srgbClr val="5B3E83"/>
+                </a:solidFill>
+                <a:latin typeface="Bricolage Grotesque"/>
+              </a:rPr>
+              <a:t>Precios</a:t>
+            </a:r>
+          </a:p>
+          <a:p>
+            <a:pPr algn="l"/>
+            <a:r>
+              <a:rPr sz="1000">
+                <a:solidFill>
+                  <a:srgbClr val="20242E"/>
+                </a:solidFill>
+                <a:latin typeface="Inter"/>
+              </a:rPr>
+              <a:t>un armario pequeño (150 €) · una mesita de noche (40 €) · cuadros o pósters (20 €)</a:t>
+            </a:r>
+          </a:p>
+        </p:txBody>
+      </p:sp>
+      <p:sp>
+        <p:nvSpPr>
+          <p:cNvPr id="21" name="Tarjeta 5"/>
+          <p:cNvSpPr/>
+          <p:nvPr/>
+        </p:nvSpPr>
+        <p:spPr>
+          <a:xfrm>
+            <a:off x="3312414" y="3968496"/>
+            <a:ext cx="2708910" cy="1170432"/>
+          </a:xfrm>
+          <a:prstGeom prst="roundRect">
+            <a:avLst>
+              <a:gd name="adj" fmla="val 6000"/>
+            </a:avLst>
+          </a:prstGeom>
+          <a:solidFill>
+            <a:srgbClr val="FFFFFF"/>
+          </a:solidFill>
+          <a:ln w="12700">
+            <a:solidFill>
+              <a:srgbClr val="E4E3DE"/>
+            </a:solidFill>
+          </a:ln>
+          <a:effectLst/>
+        </p:spPr>
+        <p:style>
+          <a:lnRef idx="1">
+            <a:schemeClr val="accent1"/>
+          </a:lnRef>
+          <a:fillRef idx="3">
+            <a:schemeClr val="accent1"/>
+          </a:fillRef>
+          <a:effectRef idx="2">
+            <a:schemeClr val="accent1"/>
+          </a:effectRef>
+          <a:fontRef idx="minor">
+            <a:schemeClr val="lt1"/>
+          </a:fontRef>
+        </p:style>
+        <p:txBody>
+          <a:bodyPr rtlCol="0" anchor="ctr"/>
+          <a:lstStyle/>
+          <a:p/>
+        </p:txBody>
+      </p:sp>
+      <p:sp>
+        <p:nvSpPr>
+          <p:cNvPr id="22" name="TarjetaTxt 5"/>
+          <p:cNvSpPr txBox="1"/>
+          <p:nvPr/>
+        </p:nvSpPr>
+        <p:spPr>
+          <a:xfrm>
+            <a:off x="3403854" y="4023360"/>
+            <a:ext cx="2526030" cy="1060704"/>
+          </a:xfrm>
+          <a:prstGeom prst="rect">
+            <a:avLst/>
+          </a:prstGeom>
+          <a:noFill/>
+        </p:spPr>
+        <p:txBody>
+          <a:bodyPr wrap="square" anchor="t" lIns="45720" rIns="45720" tIns="27432" bIns="27432">
+            <a:normAutofit/>
+          </a:bodyPr>
+          <a:lstStyle/>
+          <a:p>
+            <a:pPr algn="l"/>
+            <a:r>
+              <a:rPr sz="1100" b="1">
+                <a:solidFill>
+                  <a:srgbClr val="5B3E83"/>
+                </a:solidFill>
+                <a:latin typeface="Bricolage Grotesque"/>
+              </a:rPr>
+              <a:t>marco</a:t>
+            </a:r>
+          </a:p>
+          <a:p>
+            <a:pPr algn="l"/>
+            <a:r>
+              <a:rPr sz="1000">
+                <a:solidFill>
+                  <a:srgbClr val="20242E"/>
+                </a:solidFill>
+                <a:latin typeface="Inter"/>
+              </a:rPr>
+              <a:t>Yo pongo …</a:t>
+            </a:r>
+          </a:p>
+        </p:txBody>
+      </p:sp>
+      <p:sp>
+        <p:nvSpPr>
+          <p:cNvPr id="23" name="Tarjeta 6"/>
+          <p:cNvSpPr/>
+          <p:nvPr/>
+        </p:nvSpPr>
+        <p:spPr>
+          <a:xfrm>
+            <a:off x="6167628" y="3968496"/>
+            <a:ext cx="2708910" cy="1170432"/>
+          </a:xfrm>
+          <a:prstGeom prst="roundRect">
+            <a:avLst>
+              <a:gd name="adj" fmla="val 6000"/>
+            </a:avLst>
+          </a:prstGeom>
+          <a:solidFill>
+            <a:srgbClr val="FFFFFF"/>
+          </a:solidFill>
+          <a:ln w="12700">
+            <a:solidFill>
+              <a:srgbClr val="E4E3DE"/>
+            </a:solidFill>
+          </a:ln>
+          <a:effectLst/>
+        </p:spPr>
+        <p:style>
+          <a:lnRef idx="1">
+            <a:schemeClr val="accent1"/>
+          </a:lnRef>
+          <a:fillRef idx="3">
+            <a:schemeClr val="accent1"/>
+          </a:fillRef>
+          <a:effectRef idx="2">
+            <a:schemeClr val="accent1"/>
+          </a:effectRef>
+          <a:fontRef idx="minor">
+            <a:schemeClr val="lt1"/>
+          </a:fontRef>
+        </p:style>
+        <p:txBody>
+          <a:bodyPr rtlCol="0" anchor="ctr"/>
+          <a:lstStyle/>
+          <a:p/>
+        </p:txBody>
+      </p:sp>
+      <p:sp>
+        <p:nvSpPr>
+          <p:cNvPr id="24" name="TarjetaTxt 6"/>
+          <p:cNvSpPr txBox="1"/>
+          <p:nvPr/>
+        </p:nvSpPr>
+        <p:spPr>
+          <a:xfrm>
+            <a:off x="6259068" y="4023360"/>
+            <a:ext cx="2526030" cy="1060704"/>
+          </a:xfrm>
+          <a:prstGeom prst="rect">
+            <a:avLst/>
+          </a:prstGeom>
+          <a:noFill/>
+        </p:spPr>
+        <p:txBody>
+          <a:bodyPr wrap="square" anchor="t" lIns="45720" rIns="45720" tIns="27432" bIns="27432">
+            <a:normAutofit/>
+          </a:bodyPr>
+          <a:lstStyle/>
+          <a:p>
+            <a:pPr algn="l"/>
+            <a:r>
+              <a:rPr sz="1100" b="1">
+                <a:solidFill>
+                  <a:srgbClr val="5B3E83"/>
+                </a:solidFill>
+                <a:latin typeface="Bricolage Grotesque"/>
+              </a:rPr>
+              <a:t>marco</a:t>
+            </a:r>
+          </a:p>
+          <a:p>
+            <a:pPr algn="l"/>
+            <a:r>
+              <a:rPr sz="1000">
+                <a:solidFill>
+                  <a:srgbClr val="20242E"/>
+                </a:solidFill>
+                <a:latin typeface="Inter"/>
+              </a:rPr>
+              <a:t>Ponemos … encima de … porque …</a:t>
+            </a:r>
+          </a:p>
+        </p:txBody>
+      </p:sp>
+      <p:sp>
+        <p:nvSpPr>
+          <p:cNvPr id="25" name="Tarjeta 7"/>
+          <p:cNvSpPr/>
+          <p:nvPr/>
+        </p:nvSpPr>
+        <p:spPr>
+          <a:xfrm>
+            <a:off x="9022842" y="3968496"/>
+            <a:ext cx="2708910" cy="1170432"/>
+          </a:xfrm>
+          <a:prstGeom prst="roundRect">
+            <a:avLst>
+              <a:gd name="adj" fmla="val 6000"/>
+            </a:avLst>
+          </a:prstGeom>
+          <a:solidFill>
+            <a:srgbClr val="FFFFFF"/>
+          </a:solidFill>
+          <a:ln w="12700">
+            <a:solidFill>
+              <a:srgbClr val="E4E3DE"/>
+            </a:solidFill>
+          </a:ln>
+          <a:effectLst/>
+        </p:spPr>
+        <p:style>
+          <a:lnRef idx="1">
+            <a:schemeClr val="accent1"/>
+          </a:lnRef>
+          <a:fillRef idx="3">
+            <a:schemeClr val="accent1"/>
+          </a:fillRef>
+          <a:effectRef idx="2">
+            <a:schemeClr val="accent1"/>
+          </a:effectRef>
+          <a:fontRef idx="minor">
+            <a:schemeClr val="lt1"/>
+          </a:fontRef>
+        </p:style>
+        <p:txBody>
+          <a:bodyPr rtlCol="0" anchor="ctr"/>
+          <a:lstStyle/>
+          <a:p/>
+        </p:txBody>
+      </p:sp>
+      <p:sp>
+        <p:nvSpPr>
+          <p:cNvPr id="26" name="TarjetaTxt 7"/>
+          <p:cNvSpPr txBox="1"/>
+          <p:nvPr/>
+        </p:nvSpPr>
+        <p:spPr>
+          <a:xfrm>
+            <a:off x="9114282" y="4023360"/>
+            <a:ext cx="2526030" cy="1060704"/>
+          </a:xfrm>
+          <a:prstGeom prst="rect">
+            <a:avLst/>
+          </a:prstGeom>
+          <a:noFill/>
+        </p:spPr>
+        <p:txBody>
+          <a:bodyPr wrap="square" anchor="t" lIns="45720" rIns="45720" tIns="27432" bIns="27432">
+            <a:normAutofit/>
+          </a:bodyPr>
+          <a:lstStyle/>
+          <a:p>
+            <a:pPr algn="l"/>
+            <a:r>
+              <a:rPr sz="1100" b="1">
+                <a:solidFill>
+                  <a:srgbClr val="5B3E83"/>
+                </a:solidFill>
+                <a:latin typeface="Bricolage Grotesque"/>
+              </a:rPr>
+              <a:t>marco</a:t>
+            </a:r>
+          </a:p>
+          <a:p>
+            <a:pPr algn="l"/>
+            <a:r>
+              <a:rPr sz="1000">
+                <a:solidFill>
+                  <a:srgbClr val="20242E"/>
+                </a:solidFill>
+                <a:latin typeface="Inter"/>
+              </a:rPr>
+              <a:t>Debajo de la ventana no cabe …</a:t>
+            </a:r>
+          </a:p>
+        </p:txBody>
+      </p:sp>
+      <p:sp>
+        <p:nvSpPr>
+          <p:cNvPr id="27" name="Tarjeta 8"/>
+          <p:cNvSpPr/>
+          <p:nvPr/>
+        </p:nvSpPr>
+        <p:spPr>
+          <a:xfrm>
+            <a:off x="457200" y="5266944"/>
+            <a:ext cx="2708910" cy="1170432"/>
+          </a:xfrm>
+          <a:prstGeom prst="roundRect">
+            <a:avLst>
+              <a:gd name="adj" fmla="val 6000"/>
+            </a:avLst>
+          </a:prstGeom>
+          <a:solidFill>
+            <a:srgbClr val="FFFFFF"/>
+          </a:solidFill>
+          <a:ln w="12700">
+            <a:solidFill>
+              <a:srgbClr val="E4E3DE"/>
+            </a:solidFill>
+          </a:ln>
+          <a:effectLst/>
+        </p:spPr>
+        <p:style>
+          <a:lnRef idx="1">
+            <a:schemeClr val="accent1"/>
+          </a:lnRef>
+          <a:fillRef idx="3">
+            <a:schemeClr val="accent1"/>
+          </a:fillRef>
+          <a:effectRef idx="2">
+            <a:schemeClr val="accent1"/>
+          </a:effectRef>
+          <a:fontRef idx="minor">
+            <a:schemeClr val="lt1"/>
+          </a:fontRef>
+        </p:style>
+        <p:txBody>
+          <a:bodyPr rtlCol="0" anchor="ctr"/>
+          <a:lstStyle/>
+          <a:p/>
+        </p:txBody>
+      </p:sp>
+      <p:sp>
+        <p:nvSpPr>
+          <p:cNvPr id="28" name="TarjetaTxt 8"/>
+          <p:cNvSpPr txBox="1"/>
+          <p:nvPr/>
+        </p:nvSpPr>
+        <p:spPr>
+          <a:xfrm>
+            <a:off x="548640" y="5321808"/>
+            <a:ext cx="2526030" cy="1060704"/>
+          </a:xfrm>
+          <a:prstGeom prst="rect">
+            <a:avLst/>
+          </a:prstGeom>
+          <a:noFill/>
+        </p:spPr>
+        <p:txBody>
+          <a:bodyPr wrap="square" anchor="t" lIns="45720" rIns="45720" tIns="27432" bIns="27432">
+            <a:normAutofit/>
+          </a:bodyPr>
+          <a:lstStyle/>
+          <a:p>
+            <a:pPr algn="l"/>
+            <a:r>
+              <a:rPr sz="1100" b="1">
+                <a:solidFill>
+                  <a:srgbClr val="5B3E83"/>
+                </a:solidFill>
+                <a:latin typeface="Bricolage Grotesque"/>
+              </a:rPr>
+              <a:t>marco</a:t>
+            </a:r>
+          </a:p>
+          <a:p>
+            <a:pPr algn="l"/>
+            <a:r>
+              <a:rPr sz="1000">
+                <a:solidFill>
+                  <a:srgbClr val="20242E"/>
+                </a:solidFill>
+                <a:latin typeface="Inter"/>
+              </a:rPr>
+              <a:t>Sin … la habitación sigue igual.</a:t>
+            </a:r>
+          </a:p>
+        </p:txBody>
+      </p:sp>
+      <p:sp>
+        <p:nvSpPr>
+          <p:cNvPr id="29" name="Tarjeta 9"/>
+          <p:cNvSpPr/>
+          <p:nvPr/>
+        </p:nvSpPr>
+        <p:spPr>
+          <a:xfrm>
+            <a:off x="3312414" y="5266944"/>
+            <a:ext cx="2708910" cy="1170432"/>
+          </a:xfrm>
+          <a:prstGeom prst="roundRect">
+            <a:avLst>
+              <a:gd name="adj" fmla="val 6000"/>
+            </a:avLst>
+          </a:prstGeom>
+          <a:solidFill>
+            <a:srgbClr val="FFFFFF"/>
+          </a:solidFill>
+          <a:ln w="12700">
+            <a:solidFill>
+              <a:srgbClr val="E4E3DE"/>
+            </a:solidFill>
+          </a:ln>
+          <a:effectLst/>
+        </p:spPr>
+        <p:style>
+          <a:lnRef idx="1">
+            <a:schemeClr val="accent1"/>
+          </a:lnRef>
+          <a:fillRef idx="3">
+            <a:schemeClr val="accent1"/>
+          </a:fillRef>
+          <a:effectRef idx="2">
+            <a:schemeClr val="accent1"/>
+          </a:effectRef>
+          <a:fontRef idx="minor">
+            <a:schemeClr val="lt1"/>
+          </a:fontRef>
+        </p:style>
+        <p:txBody>
+          <a:bodyPr rtlCol="0" anchor="ctr"/>
+          <a:lstStyle/>
+          <a:p/>
+        </p:txBody>
+      </p:sp>
+      <p:sp>
+        <p:nvSpPr>
+          <p:cNvPr id="30" name="TarjetaTxt 9"/>
+          <p:cNvSpPr txBox="1"/>
+          <p:nvPr/>
+        </p:nvSpPr>
+        <p:spPr>
+          <a:xfrm>
+            <a:off x="3403854" y="5321808"/>
+            <a:ext cx="2526030" cy="1060704"/>
+          </a:xfrm>
+          <a:prstGeom prst="rect">
+            <a:avLst/>
+          </a:prstGeom>
+          <a:noFill/>
+        </p:spPr>
+        <p:txBody>
+          <a:bodyPr wrap="square" anchor="t" lIns="45720" rIns="45720" tIns="27432" bIns="27432">
+            <a:normAutofit/>
+          </a:bodyPr>
+          <a:lstStyle/>
+          <a:p>
+            <a:pPr algn="l"/>
+            <a:r>
+              <a:rPr sz="1100" b="1">
+                <a:solidFill>
+                  <a:srgbClr val="5B3E83"/>
+                </a:solidFill>
+                <a:latin typeface="Bricolage Grotesque"/>
+              </a:rPr>
+              <a:t>marco</a:t>
+            </a:r>
+          </a:p>
+          <a:p>
+            <a:pPr algn="l"/>
+            <a:r>
+              <a:rPr sz="1000">
+                <a:solidFill>
+                  <a:srgbClr val="20242E"/>
+                </a:solidFill>
+                <a:latin typeface="Inter"/>
+              </a:rPr>
+              <a:t>Nos quedan … euros. ¿Qué hacemos?</a:t>
+            </a:r>
+          </a:p>
+        </p:txBody>
+      </p:sp>
+    </p:spTree>
+  </p:cSld>
+  <p:clrMapOvr>
+    <a:masterClrMapping/>
+  </p:clrMapOvr>
+</p:sld>
+</file>
+
+<file path=ppt/slides/slide24.xml><?xml version="1.0" encoding="utf-8"?>
+<p:sld xmlns:a="http://schemas.openxmlformats.org/drawingml/2006/main" xmlns:p="http://schemas.openxmlformats.org/presentationml/2006/main" xmlns:r="http://schemas.openxmlformats.org/officeDocument/2006/relationships">
+  <p:cSld>
+    <p:spTree>
+      <p:nvGrpSpPr>
+        <p:cNvPr id="1" name=""/>
+        <p:cNvGrpSpPr/>
+        <p:nvPr/>
+      </p:nvGrpSpPr>
+      <p:grpSpPr/>
+      <p:sp>
+        <p:nvSpPr>
+          <p:cNvPr id="2" name="Fondo"/>
+          <p:cNvSpPr/>
+          <p:nvPr/>
+        </p:nvSpPr>
+        <p:spPr>
+          <a:xfrm>
+            <a:off x="0" y="0"/>
+            <a:ext cx="12191695" cy="6858000"/>
+          </a:xfrm>
+          <a:prstGeom prst="rect">
+            <a:avLst/>
+          </a:prstGeom>
+          <a:solidFill>
+            <a:srgbClr val="FCFBF8"/>
+          </a:solidFill>
+          <a:ln>
+            <a:noFill/>
+          </a:ln>
+          <a:effectLst/>
+        </p:spPr>
+        <p:style>
+          <a:lnRef idx="1">
+            <a:schemeClr val="accent1"/>
+          </a:lnRef>
+          <a:fillRef idx="3">
+            <a:schemeClr val="accent1"/>
+          </a:fillRef>
+          <a:effectRef idx="2">
+            <a:schemeClr val="accent1"/>
+          </a:effectRef>
+          <a:fontRef idx="minor">
+            <a:schemeClr val="lt1"/>
+          </a:fontRef>
+        </p:style>
+        <p:txBody>
+          <a:bodyPr rtlCol="0" anchor="ctr"/>
+          <a:lstStyle/>
+          <a:p/>
+        </p:txBody>
+      </p:sp>
+      <p:sp>
+        <p:nvSpPr>
+          <p:cNvPr id="3" name="Cabecera"/>
+          <p:cNvSpPr/>
+          <p:nvPr/>
+        </p:nvSpPr>
+        <p:spPr>
+          <a:xfrm>
+            <a:off x="0" y="0"/>
+            <a:ext cx="12191695" cy="1078992"/>
+          </a:xfrm>
+          <a:prstGeom prst="rect">
+            <a:avLst/>
+          </a:prstGeom>
+          <a:solidFill>
+            <a:srgbClr val="7C56A9"/>
+          </a:solidFill>
+          <a:ln>
+            <a:noFill/>
+          </a:ln>
+          <a:effectLst/>
+        </p:spPr>
+        <p:style>
+          <a:lnRef idx="1">
+            <a:schemeClr val="accent1"/>
+          </a:lnRef>
+          <a:fillRef idx="3">
+            <a:schemeClr val="accent1"/>
+          </a:fillRef>
+          <a:effectRef idx="2">
+            <a:schemeClr val="accent1"/>
+          </a:effectRef>
+          <a:fontRef idx="minor">
+            <a:schemeClr val="lt1"/>
+          </a:fontRef>
+        </p:style>
+        <p:txBody>
+          <a:bodyPr rtlCol="0" anchor="ctr"/>
+          <a:lstStyle/>
+          <a:p/>
+        </p:txBody>
+      </p:sp>
+      <p:sp>
+        <p:nvSpPr>
+          <p:cNvPr id="4" name="Chip"/>
+          <p:cNvSpPr/>
+          <p:nvPr/>
+        </p:nvSpPr>
+        <p:spPr>
+          <a:xfrm>
+            <a:off x="457200" y="182880"/>
+            <a:ext cx="3017520" cy="292608"/>
+          </a:xfrm>
+          <a:prstGeom prst="roundRect">
+            <a:avLst>
+              <a:gd name="adj" fmla="val 50000"/>
+            </a:avLst>
+          </a:prstGeom>
+          <a:solidFill>
+            <a:srgbClr val="FFFFFF"/>
+          </a:solidFill>
+          <a:ln>
+            <a:noFill/>
+          </a:ln>
+          <a:effectLst/>
+        </p:spPr>
+        <p:style>
+          <a:lnRef idx="1">
+            <a:schemeClr val="accent1"/>
+          </a:lnRef>
+          <a:fillRef idx="3">
+            <a:schemeClr val="accent1"/>
+          </a:fillRef>
+          <a:effectRef idx="2">
+            <a:schemeClr val="accent1"/>
+          </a:effectRef>
+          <a:fontRef idx="minor">
+            <a:schemeClr val="lt1"/>
+          </a:fontRef>
+        </p:style>
+        <p:txBody>
+          <a:bodyPr rtlCol="0" anchor="ctr"/>
+          <a:lstStyle/>
+          <a:p/>
+        </p:txBody>
+      </p:sp>
+      <p:sp>
+        <p:nvSpPr>
+          <p:cNvPr id="5" name="ChipTxt"/>
+          <p:cNvSpPr txBox="1"/>
+          <p:nvPr/>
+        </p:nvSpPr>
+        <p:spPr>
+          <a:xfrm>
+            <a:off x="457200" y="173736"/>
+            <a:ext cx="3017520" cy="310896"/>
+          </a:xfrm>
+          <a:prstGeom prst="rect">
+            <a:avLst/>
+          </a:prstGeom>
+          <a:noFill/>
+        </p:spPr>
+        <p:txBody>
+          <a:bodyPr wrap="square" anchor="ctr" lIns="45720" rIns="45720" tIns="27432" bIns="27432">
+            <a:normAutofit/>
+          </a:bodyPr>
+          <a:lstStyle/>
+          <a:p>
+            <a:pPr algn="ctr"/>
+            <a:r>
+              <a:rPr sz="950" b="1">
+                <a:solidFill>
+                  <a:srgbClr val="5B3E83"/>
+                </a:solidFill>
+                <a:latin typeface="Inter"/>
+              </a:rPr>
+              <a:t>RETO 9 · MEDIAFORMAT</a:t>
+            </a:r>
+          </a:p>
+        </p:txBody>
+      </p:sp>
+      <p:sp>
+        <p:nvSpPr>
+          <p:cNvPr id="6" name="Titulo"/>
+          <p:cNvSpPr txBox="1"/>
+          <p:nvPr/>
+        </p:nvSpPr>
+        <p:spPr>
+          <a:xfrm>
+            <a:off x="457200" y="502920"/>
+            <a:ext cx="8412480" cy="475488"/>
+          </a:xfrm>
+          <a:prstGeom prst="rect">
+            <a:avLst/>
+          </a:prstGeom>
+          <a:noFill/>
+        </p:spPr>
+        <p:txBody>
+          <a:bodyPr wrap="square" anchor="t" lIns="45720" rIns="45720" tIns="27432" bIns="27432">
+            <a:normAutofit/>
+          </a:bodyPr>
+          <a:lstStyle/>
+          <a:p>
+            <a:pPr algn="l"/>
+            <a:r>
+              <a:rPr sz="2700" b="1">
+                <a:solidFill>
+                  <a:srgbClr val="FFFFFF"/>
+                </a:solidFill>
+                <a:latin typeface="Bricolage Grotesque"/>
+              </a:rPr>
+              <a:t>Tour de 40 segundos</a:t>
+            </a:r>
+          </a:p>
+        </p:txBody>
+      </p:sp>
+      <p:sp>
+        <p:nvSpPr>
+          <p:cNvPr id="7" name="Badges"/>
+          <p:cNvSpPr txBox="1"/>
+          <p:nvPr/>
+        </p:nvSpPr>
+        <p:spPr>
+          <a:xfrm>
+            <a:off x="9052560" y="256032"/>
+            <a:ext cx="2651760" cy="640080"/>
+          </a:xfrm>
+          <a:prstGeom prst="rect">
+            <a:avLst/>
+          </a:prstGeom>
+          <a:noFill/>
+        </p:spPr>
+        <p:txBody>
+          <a:bodyPr wrap="square" anchor="t" lIns="45720" rIns="45720" tIns="27432" bIns="27432">
+            <a:normAutofit/>
+          </a:bodyPr>
+          <a:lstStyle/>
+          <a:p>
+            <a:pPr algn="r"/>
+            <a:r>
+              <a:rPr sz="1000">
+                <a:solidFill>
+                  <a:srgbClr val="EEE8F5"/>
+                </a:solidFill>
+                <a:latin typeface="Inter"/>
+              </a:rPr>
+              <a:t>👤 Solo</a:t>
+            </a:r>
+          </a:p>
+          <a:p>
+            <a:pPr algn="r"/>
+            <a:r>
+              <a:rPr sz="1000">
+                <a:solidFill>
+                  <a:srgbClr val="EEE8F5"/>
+                </a:solidFill>
+                <a:latin typeface="Inter"/>
+              </a:rPr>
+              <a:t>± 12 min · ★★★</a:t>
+            </a:r>
+          </a:p>
+        </p:txBody>
+      </p:sp>
+      <p:sp>
+        <p:nvSpPr>
+          <p:cNvPr id="8" name="Gancho"/>
+          <p:cNvSpPr txBox="1"/>
+          <p:nvPr/>
+        </p:nvSpPr>
+        <p:spPr>
+          <a:xfrm>
+            <a:off x="457200" y="1225296"/>
+            <a:ext cx="11274552" cy="566928"/>
+          </a:xfrm>
+          <a:prstGeom prst="rect">
+            <a:avLst/>
+          </a:prstGeom>
+          <a:noFill/>
+        </p:spPr>
+        <p:txBody>
+          <a:bodyPr wrap="square" anchor="t" lIns="45720" rIns="45720" tIns="27432" bIns="27432">
+            <a:normAutofit/>
+          </a:bodyPr>
+          <a:lstStyle/>
+          <a:p>
+            <a:pPr algn="l"/>
+            <a:r>
+              <a:rPr sz="1600" b="1">
+                <a:solidFill>
+                  <a:srgbClr val="5B3E83"/>
+                </a:solidFill>
+                <a:latin typeface="Bricolage Grotesque"/>
+              </a:rPr>
+              <a:t>Cuarenta segundos, una sola toma, toda la casa.</a:t>
+            </a:r>
+          </a:p>
+          <a:p>
+            <a:pPr algn="l"/>
+            <a:r>
+              <a:rPr sz="1100" i="1">
+                <a:solidFill>
+                  <a:srgbClr val="6A6E78"/>
+                </a:solidFill>
+                <a:latin typeface="Inter"/>
+              </a:rPr>
+              <a:t>Veertig seconden, één take, het hele huis.</a:t>
+            </a:r>
+          </a:p>
+        </p:txBody>
+      </p:sp>
+      <p:sp>
+        <p:nvSpPr>
+          <p:cNvPr id="9" name="ReglaCaja"/>
+          <p:cNvSpPr/>
+          <p:nvPr/>
+        </p:nvSpPr>
+        <p:spPr>
+          <a:xfrm>
+            <a:off x="457200" y="1847088"/>
+            <a:ext cx="11274552" cy="658368"/>
+          </a:xfrm>
+          <a:prstGeom prst="roundRect">
+            <a:avLst>
+              <a:gd name="adj" fmla="val 5000"/>
+            </a:avLst>
+          </a:prstGeom>
+          <a:solidFill>
+            <a:srgbClr val="FBF3D6"/>
+          </a:solidFill>
+          <a:ln>
+            <a:noFill/>
+          </a:ln>
+          <a:effectLst/>
+        </p:spPr>
+        <p:style>
+          <a:lnRef idx="1">
+            <a:schemeClr val="accent1"/>
+          </a:lnRef>
+          <a:fillRef idx="3">
+            <a:schemeClr val="accent1"/>
+          </a:fillRef>
+          <a:effectRef idx="2">
+            <a:schemeClr val="accent1"/>
+          </a:effectRef>
+          <a:fontRef idx="minor">
+            <a:schemeClr val="lt1"/>
+          </a:fontRef>
+        </p:style>
+        <p:txBody>
+          <a:bodyPr rtlCol="0" anchor="ctr"/>
+          <a:lstStyle/>
+          <a:p/>
+        </p:txBody>
+      </p:sp>
+      <p:sp>
+        <p:nvSpPr>
+          <p:cNvPr id="10" name="ReglaTxt"/>
+          <p:cNvSpPr txBox="1"/>
+          <p:nvPr/>
+        </p:nvSpPr>
+        <p:spPr>
+          <a:xfrm>
+            <a:off x="603504" y="1883664"/>
+            <a:ext cx="10972800" cy="585216"/>
+          </a:xfrm>
+          <a:prstGeom prst="rect">
+            <a:avLst/>
+          </a:prstGeom>
+          <a:noFill/>
+        </p:spPr>
+        <p:txBody>
+          <a:bodyPr wrap="square" anchor="t" lIns="45720" rIns="45720" tIns="27432" bIns="27432">
+            <a:normAutofit/>
+          </a:bodyPr>
+          <a:lstStyle/>
+          <a:p>
+            <a:pPr algn="l"/>
+            <a:r>
+              <a:rPr sz="850" b="1">
+                <a:solidFill>
+                  <a:srgbClr val="B7860B"/>
+                </a:solidFill>
+                <a:latin typeface="Inter"/>
+              </a:rPr>
+              <a:t>LA REGLA DEL RETO</a:t>
+            </a:r>
+          </a:p>
+          <a:p>
+            <a:pPr algn="l"/>
+            <a:r>
+              <a:rPr sz="1100">
+                <a:solidFill>
+                  <a:srgbClr val="20242E"/>
+                </a:solidFill>
+                <a:latin typeface="Inter"/>
+              </a:rPr>
+              <a:t>Eén doorlopende take van veertig seconden. Stoppen mag niet, herbeginnen wel — maar dan vanaf nul. Zes verschillende voorzetsels en drie gerundio's.</a:t>
+            </a:r>
+          </a:p>
+        </p:txBody>
+      </p:sp>
+      <p:sp>
+        <p:nvSpPr>
+          <p:cNvPr id="11" name="Tarjeta 0"/>
+          <p:cNvSpPr/>
+          <p:nvPr/>
+        </p:nvSpPr>
+        <p:spPr>
+          <a:xfrm>
+            <a:off x="457200" y="2670048"/>
+            <a:ext cx="2708910" cy="1170432"/>
+          </a:xfrm>
+          <a:prstGeom prst="roundRect">
+            <a:avLst>
+              <a:gd name="adj" fmla="val 6000"/>
+            </a:avLst>
+          </a:prstGeom>
+          <a:solidFill>
+            <a:srgbClr val="FFFFFF"/>
+          </a:solidFill>
+          <a:ln w="12700">
+            <a:solidFill>
+              <a:srgbClr val="E4E3DE"/>
+            </a:solidFill>
+          </a:ln>
+          <a:effectLst/>
+        </p:spPr>
+        <p:style>
+          <a:lnRef idx="1">
+            <a:schemeClr val="accent1"/>
+          </a:lnRef>
+          <a:fillRef idx="3">
+            <a:schemeClr val="accent1"/>
+          </a:fillRef>
+          <a:effectRef idx="2">
+            <a:schemeClr val="accent1"/>
+          </a:effectRef>
+          <a:fontRef idx="minor">
+            <a:schemeClr val="lt1"/>
+          </a:fontRef>
+        </p:style>
+        <p:txBody>
+          <a:bodyPr rtlCol="0" anchor="ctr"/>
+          <a:lstStyle/>
+          <a:p/>
+        </p:txBody>
+      </p:sp>
+      <p:sp>
+        <p:nvSpPr>
+          <p:cNvPr id="12" name="TarjetaTxt 0"/>
+          <p:cNvSpPr txBox="1"/>
+          <p:nvPr/>
+        </p:nvSpPr>
+        <p:spPr>
+          <a:xfrm>
+            <a:off x="548640" y="2724912"/>
+            <a:ext cx="2526030" cy="1060704"/>
+          </a:xfrm>
+          <a:prstGeom prst="rect">
+            <a:avLst/>
+          </a:prstGeom>
+          <a:noFill/>
+        </p:spPr>
+        <p:txBody>
+          <a:bodyPr wrap="square" anchor="t" lIns="45720" rIns="45720" tIns="27432" bIns="27432">
+            <a:normAutofit/>
+          </a:bodyPr>
+          <a:lstStyle/>
+          <a:p>
+            <a:pPr algn="l"/>
+            <a:r>
+              <a:rPr sz="1100" b="1">
+                <a:solidFill>
+                  <a:srgbClr val="5B3E83"/>
+                </a:solidFill>
+                <a:latin typeface="Bricolage Grotesque"/>
+              </a:rPr>
+              <a:t>Preposiciones</a:t>
+            </a:r>
+          </a:p>
+          <a:p>
+            <a:pPr algn="l"/>
+            <a:r>
+              <a:rPr sz="1000">
+                <a:solidFill>
+                  <a:srgbClr val="20242E"/>
+                </a:solidFill>
+                <a:latin typeface="Inter"/>
+              </a:rPr>
+              <a:t>al lado de · enfrente de · detrás de · debajo de</a:t>
+            </a:r>
+          </a:p>
+        </p:txBody>
+      </p:sp>
+      <p:sp>
+        <p:nvSpPr>
+          <p:cNvPr id="13" name="Tarjeta 1"/>
+          <p:cNvSpPr/>
+          <p:nvPr/>
+        </p:nvSpPr>
+        <p:spPr>
+          <a:xfrm>
+            <a:off x="3312414" y="2670048"/>
+            <a:ext cx="2708910" cy="1170432"/>
+          </a:xfrm>
+          <a:prstGeom prst="roundRect">
+            <a:avLst>
+              <a:gd name="adj" fmla="val 6000"/>
+            </a:avLst>
+          </a:prstGeom>
+          <a:solidFill>
+            <a:srgbClr val="FFFFFF"/>
+          </a:solidFill>
+          <a:ln w="12700">
+            <a:solidFill>
+              <a:srgbClr val="E4E3DE"/>
+            </a:solidFill>
+          </a:ln>
+          <a:effectLst/>
+        </p:spPr>
+        <p:style>
+          <a:lnRef idx="1">
+            <a:schemeClr val="accent1"/>
+          </a:lnRef>
+          <a:fillRef idx="3">
+            <a:schemeClr val="accent1"/>
+          </a:fillRef>
+          <a:effectRef idx="2">
+            <a:schemeClr val="accent1"/>
+          </a:effectRef>
+          <a:fontRef idx="minor">
+            <a:schemeClr val="lt1"/>
+          </a:fontRef>
+        </p:style>
+        <p:txBody>
+          <a:bodyPr rtlCol="0" anchor="ctr"/>
+          <a:lstStyle/>
+          <a:p/>
+        </p:txBody>
+      </p:sp>
+      <p:sp>
+        <p:nvSpPr>
+          <p:cNvPr id="14" name="TarjetaTxt 1"/>
+          <p:cNvSpPr txBox="1"/>
+          <p:nvPr/>
+        </p:nvSpPr>
+        <p:spPr>
+          <a:xfrm>
+            <a:off x="3403854" y="2724912"/>
+            <a:ext cx="2526030" cy="1060704"/>
+          </a:xfrm>
+          <a:prstGeom prst="rect">
+            <a:avLst/>
+          </a:prstGeom>
+          <a:noFill/>
+        </p:spPr>
+        <p:txBody>
+          <a:bodyPr wrap="square" anchor="t" lIns="45720" rIns="45720" tIns="27432" bIns="27432">
+            <a:normAutofit/>
+          </a:bodyPr>
+          <a:lstStyle/>
+          <a:p>
+            <a:pPr algn="l"/>
+            <a:r>
+              <a:rPr sz="1100" b="1">
+                <a:solidFill>
+                  <a:srgbClr val="5B3E83"/>
+                </a:solidFill>
+                <a:latin typeface="Bricolage Grotesque"/>
+              </a:rPr>
+              <a:t>Preposiciones</a:t>
+            </a:r>
+          </a:p>
+          <a:p>
+            <a:pPr algn="l"/>
+            <a:r>
+              <a:rPr sz="1000">
+                <a:solidFill>
+                  <a:srgbClr val="20242E"/>
+                </a:solidFill>
+                <a:latin typeface="Inter"/>
+              </a:rPr>
+              <a:t>encima de · entre · al final de · a la derecha de</a:t>
+            </a:r>
+          </a:p>
+        </p:txBody>
+      </p:sp>
+      <p:sp>
+        <p:nvSpPr>
+          <p:cNvPr id="15" name="Tarjeta 2"/>
+          <p:cNvSpPr/>
+          <p:nvPr/>
+        </p:nvSpPr>
+        <p:spPr>
+          <a:xfrm>
+            <a:off x="6167628" y="2670048"/>
+            <a:ext cx="2708910" cy="1170432"/>
+          </a:xfrm>
+          <a:prstGeom prst="roundRect">
+            <a:avLst>
+              <a:gd name="adj" fmla="val 6000"/>
+            </a:avLst>
+          </a:prstGeom>
+          <a:solidFill>
+            <a:srgbClr val="FFFFFF"/>
+          </a:solidFill>
+          <a:ln w="12700">
+            <a:solidFill>
+              <a:srgbClr val="E4E3DE"/>
+            </a:solidFill>
+          </a:ln>
+          <a:effectLst/>
+        </p:spPr>
+        <p:style>
+          <a:lnRef idx="1">
+            <a:schemeClr val="accent1"/>
+          </a:lnRef>
+          <a:fillRef idx="3">
+            <a:schemeClr val="accent1"/>
+          </a:fillRef>
+          <a:effectRef idx="2">
+            <a:schemeClr val="accent1"/>
+          </a:effectRef>
+          <a:fontRef idx="minor">
+            <a:schemeClr val="lt1"/>
+          </a:fontRef>
+        </p:style>
+        <p:txBody>
+          <a:bodyPr rtlCol="0" anchor="ctr"/>
+          <a:lstStyle/>
+          <a:p/>
+        </p:txBody>
+      </p:sp>
+      <p:sp>
+        <p:nvSpPr>
+          <p:cNvPr id="16" name="TarjetaTxt 2"/>
+          <p:cNvSpPr txBox="1"/>
+          <p:nvPr/>
+        </p:nvSpPr>
+        <p:spPr>
+          <a:xfrm>
+            <a:off x="6259068" y="2724912"/>
+            <a:ext cx="2526030" cy="1060704"/>
+          </a:xfrm>
+          <a:prstGeom prst="rect">
+            <a:avLst/>
+          </a:prstGeom>
+          <a:noFill/>
+        </p:spPr>
+        <p:txBody>
+          <a:bodyPr wrap="square" anchor="t" lIns="45720" rIns="45720" tIns="27432" bIns="27432">
+            <a:normAutofit/>
+          </a:bodyPr>
+          <a:lstStyle/>
+          <a:p>
+            <a:pPr algn="l"/>
+            <a:r>
+              <a:rPr sz="1100" b="1">
+                <a:solidFill>
+                  <a:srgbClr val="5B3E83"/>
+                </a:solidFill>
+                <a:latin typeface="Bricolage Grotesque"/>
+              </a:rPr>
+              <a:t>Gerundios</a:t>
+            </a:r>
+          </a:p>
+          <a:p>
+            <a:pPr algn="l"/>
+            <a:r>
+              <a:rPr sz="1000">
+                <a:solidFill>
+                  <a:srgbClr val="20242E"/>
+                </a:solidFill>
+                <a:latin typeface="Inter"/>
+              </a:rPr>
+              <a:t>entrando · pasando · subiendo</a:t>
+            </a:r>
+          </a:p>
+        </p:txBody>
+      </p:sp>
+      <p:sp>
+        <p:nvSpPr>
+          <p:cNvPr id="17" name="Tarjeta 3"/>
+          <p:cNvSpPr/>
+          <p:nvPr/>
+        </p:nvSpPr>
+        <p:spPr>
+          <a:xfrm>
+            <a:off x="9022842" y="2670048"/>
+            <a:ext cx="2708910" cy="1170432"/>
+          </a:xfrm>
+          <a:prstGeom prst="roundRect">
+            <a:avLst>
+              <a:gd name="adj" fmla="val 6000"/>
+            </a:avLst>
+          </a:prstGeom>
+          <a:solidFill>
+            <a:srgbClr val="FFFFFF"/>
+          </a:solidFill>
+          <a:ln w="12700">
+            <a:solidFill>
+              <a:srgbClr val="E4E3DE"/>
+            </a:solidFill>
+          </a:ln>
+          <a:effectLst/>
+        </p:spPr>
+        <p:style>
+          <a:lnRef idx="1">
+            <a:schemeClr val="accent1"/>
+          </a:lnRef>
+          <a:fillRef idx="3">
+            <a:schemeClr val="accent1"/>
+          </a:fillRef>
+          <a:effectRef idx="2">
+            <a:schemeClr val="accent1"/>
+          </a:effectRef>
+          <a:fontRef idx="minor">
+            <a:schemeClr val="lt1"/>
+          </a:fontRef>
+        </p:style>
+        <p:txBody>
+          <a:bodyPr rtlCol="0" anchor="ctr"/>
+          <a:lstStyle/>
+          <a:p/>
+        </p:txBody>
+      </p:sp>
+      <p:sp>
+        <p:nvSpPr>
+          <p:cNvPr id="18" name="TarjetaTxt 3"/>
+          <p:cNvSpPr txBox="1"/>
+          <p:nvPr/>
+        </p:nvSpPr>
+        <p:spPr>
+          <a:xfrm>
+            <a:off x="9114282" y="2724912"/>
+            <a:ext cx="2526030" cy="1060704"/>
+          </a:xfrm>
+          <a:prstGeom prst="rect">
+            <a:avLst/>
+          </a:prstGeom>
+          <a:noFill/>
+        </p:spPr>
+        <p:txBody>
+          <a:bodyPr wrap="square" anchor="t" lIns="45720" rIns="45720" tIns="27432" bIns="27432">
+            <a:normAutofit/>
+          </a:bodyPr>
+          <a:lstStyle/>
+          <a:p>
+            <a:pPr algn="l"/>
+            <a:r>
+              <a:rPr sz="1100" b="1">
+                <a:solidFill>
+                  <a:srgbClr val="5B3E83"/>
+                </a:solidFill>
+                <a:latin typeface="Bricolage Grotesque"/>
+              </a:rPr>
+              <a:t>Gerundios</a:t>
+            </a:r>
+          </a:p>
+          <a:p>
+            <a:pPr algn="l"/>
+            <a:r>
+              <a:rPr sz="1000">
+                <a:solidFill>
+                  <a:srgbClr val="20242E"/>
+                </a:solidFill>
+                <a:latin typeface="Inter"/>
+              </a:rPr>
+              <a:t>girando · saliendo · llegando</a:t>
+            </a:r>
+          </a:p>
+        </p:txBody>
+      </p:sp>
+      <p:sp>
+        <p:nvSpPr>
+          <p:cNvPr id="19" name="Tarjeta 4"/>
+          <p:cNvSpPr/>
+          <p:nvPr/>
+        </p:nvSpPr>
+        <p:spPr>
+          <a:xfrm>
+            <a:off x="457200" y="3968496"/>
+            <a:ext cx="2708910" cy="1170432"/>
+          </a:xfrm>
+          <a:prstGeom prst="roundRect">
+            <a:avLst>
+              <a:gd name="adj" fmla="val 6000"/>
+            </a:avLst>
+          </a:prstGeom>
+          <a:solidFill>
+            <a:srgbClr val="FFFFFF"/>
+          </a:solidFill>
+          <a:ln w="12700">
+            <a:solidFill>
+              <a:srgbClr val="E4E3DE"/>
+            </a:solidFill>
+          </a:ln>
+          <a:effectLst/>
+        </p:spPr>
+        <p:style>
+          <a:lnRef idx="1">
+            <a:schemeClr val="accent1"/>
+          </a:lnRef>
+          <a:fillRef idx="3">
+            <a:schemeClr val="accent1"/>
+          </a:fillRef>
+          <a:effectRef idx="2">
+            <a:schemeClr val="accent1"/>
+          </a:effectRef>
+          <a:fontRef idx="minor">
+            <a:schemeClr val="lt1"/>
+          </a:fontRef>
+        </p:style>
+        <p:txBody>
+          <a:bodyPr rtlCol="0" anchor="ctr"/>
+          <a:lstStyle/>
+          <a:p/>
+        </p:txBody>
+      </p:sp>
+      <p:sp>
+        <p:nvSpPr>
+          <p:cNvPr id="20" name="TarjetaTxt 4"/>
+          <p:cNvSpPr txBox="1"/>
+          <p:nvPr/>
+        </p:nvSpPr>
+        <p:spPr>
+          <a:xfrm>
+            <a:off x="548640" y="4023360"/>
+            <a:ext cx="2526030" cy="1060704"/>
+          </a:xfrm>
+          <a:prstGeom prst="rect">
+            <a:avLst/>
+          </a:prstGeom>
+          <a:noFill/>
+        </p:spPr>
+        <p:txBody>
+          <a:bodyPr wrap="square" anchor="t" lIns="45720" rIns="45720" tIns="27432" bIns="27432">
+            <a:normAutofit/>
+          </a:bodyPr>
+          <a:lstStyle/>
+          <a:p>
+            <a:pPr algn="l"/>
+            <a:r>
+              <a:rPr sz="1100" b="1">
+                <a:solidFill>
+                  <a:srgbClr val="5B3E83"/>
+                </a:solidFill>
+                <a:latin typeface="Bricolage Grotesque"/>
+              </a:rPr>
+              <a:t>marco</a:t>
+            </a:r>
+          </a:p>
+          <a:p>
+            <a:pPr algn="l"/>
+            <a:r>
+              <a:rPr sz="1000">
+                <a:solidFill>
+                  <a:srgbClr val="20242E"/>
+                </a:solidFill>
+                <a:latin typeface="Inter"/>
+              </a:rPr>
+              <a:t>Empezamos aquí, entrando por …</a:t>
+            </a:r>
+          </a:p>
+        </p:txBody>
+      </p:sp>
+      <p:sp>
+        <p:nvSpPr>
+          <p:cNvPr id="21" name="Tarjeta 5"/>
+          <p:cNvSpPr/>
+          <p:nvPr/>
+        </p:nvSpPr>
+        <p:spPr>
+          <a:xfrm>
+            <a:off x="3312414" y="3968496"/>
+            <a:ext cx="2708910" cy="1170432"/>
+          </a:xfrm>
+          <a:prstGeom prst="roundRect">
+            <a:avLst>
+              <a:gd name="adj" fmla="val 6000"/>
+            </a:avLst>
+          </a:prstGeom>
+          <a:solidFill>
+            <a:srgbClr val="FFFFFF"/>
+          </a:solidFill>
+          <a:ln w="12700">
+            <a:solidFill>
+              <a:srgbClr val="E4E3DE"/>
+            </a:solidFill>
+          </a:ln>
+          <a:effectLst/>
+        </p:spPr>
+        <p:style>
+          <a:lnRef idx="1">
+            <a:schemeClr val="accent1"/>
+          </a:lnRef>
+          <a:fillRef idx="3">
+            <a:schemeClr val="accent1"/>
+          </a:fillRef>
+          <a:effectRef idx="2">
+            <a:schemeClr val="accent1"/>
+          </a:effectRef>
+          <a:fontRef idx="minor">
+            <a:schemeClr val="lt1"/>
+          </a:fontRef>
+        </p:style>
+        <p:txBody>
+          <a:bodyPr rtlCol="0" anchor="ctr"/>
+          <a:lstStyle/>
+          <a:p/>
+        </p:txBody>
+      </p:sp>
+      <p:sp>
+        <p:nvSpPr>
+          <p:cNvPr id="22" name="TarjetaTxt 5"/>
+          <p:cNvSpPr txBox="1"/>
+          <p:nvPr/>
+        </p:nvSpPr>
+        <p:spPr>
+          <a:xfrm>
+            <a:off x="3403854" y="4023360"/>
+            <a:ext cx="2526030" cy="1060704"/>
+          </a:xfrm>
+          <a:prstGeom prst="rect">
+            <a:avLst/>
+          </a:prstGeom>
+          <a:noFill/>
+        </p:spPr>
+        <p:txBody>
+          <a:bodyPr wrap="square" anchor="t" lIns="45720" rIns="45720" tIns="27432" bIns="27432">
+            <a:normAutofit/>
+          </a:bodyPr>
+          <a:lstStyle/>
+          <a:p>
+            <a:pPr algn="l"/>
+            <a:r>
+              <a:rPr sz="1100" b="1">
+                <a:solidFill>
+                  <a:srgbClr val="5B3E83"/>
+                </a:solidFill>
+                <a:latin typeface="Bricolage Grotesque"/>
+              </a:rPr>
+              <a:t>marco</a:t>
+            </a:r>
+          </a:p>
+          <a:p>
+            <a:pPr algn="l"/>
+            <a:r>
+              <a:rPr sz="1000">
+                <a:solidFill>
+                  <a:srgbClr val="20242E"/>
+                </a:solidFill>
+                <a:latin typeface="Inter"/>
+              </a:rPr>
+              <a:t>A la derecha de … está …</a:t>
+            </a:r>
+          </a:p>
+        </p:txBody>
+      </p:sp>
+      <p:sp>
+        <p:nvSpPr>
+          <p:cNvPr id="23" name="Tarjeta 6"/>
+          <p:cNvSpPr/>
+          <p:nvPr/>
+        </p:nvSpPr>
+        <p:spPr>
+          <a:xfrm>
+            <a:off x="6167628" y="3968496"/>
+            <a:ext cx="2708910" cy="1170432"/>
+          </a:xfrm>
+          <a:prstGeom prst="roundRect">
+            <a:avLst>
+              <a:gd name="adj" fmla="val 6000"/>
+            </a:avLst>
+          </a:prstGeom>
+          <a:solidFill>
+            <a:srgbClr val="FFFFFF"/>
+          </a:solidFill>
+          <a:ln w="12700">
+            <a:solidFill>
+              <a:srgbClr val="E4E3DE"/>
+            </a:solidFill>
+          </a:ln>
+          <a:effectLst/>
+        </p:spPr>
+        <p:style>
+          <a:lnRef idx="1">
+            <a:schemeClr val="accent1"/>
+          </a:lnRef>
+          <a:fillRef idx="3">
+            <a:schemeClr val="accent1"/>
+          </a:fillRef>
+          <a:effectRef idx="2">
+            <a:schemeClr val="accent1"/>
+          </a:effectRef>
+          <a:fontRef idx="minor">
+            <a:schemeClr val="lt1"/>
+          </a:fontRef>
+        </p:style>
+        <p:txBody>
+          <a:bodyPr rtlCol="0" anchor="ctr"/>
+          <a:lstStyle/>
+          <a:p/>
+        </p:txBody>
+      </p:sp>
+      <p:sp>
+        <p:nvSpPr>
+          <p:cNvPr id="24" name="TarjetaTxt 6"/>
+          <p:cNvSpPr txBox="1"/>
+          <p:nvPr/>
+        </p:nvSpPr>
+        <p:spPr>
+          <a:xfrm>
+            <a:off x="6259068" y="4023360"/>
+            <a:ext cx="2526030" cy="1060704"/>
+          </a:xfrm>
+          <a:prstGeom prst="rect">
+            <a:avLst/>
+          </a:prstGeom>
+          <a:noFill/>
+        </p:spPr>
+        <p:txBody>
+          <a:bodyPr wrap="square" anchor="t" lIns="45720" rIns="45720" tIns="27432" bIns="27432">
+            <a:normAutofit/>
+          </a:bodyPr>
+          <a:lstStyle/>
+          <a:p>
+            <a:pPr algn="l"/>
+            <a:r>
+              <a:rPr sz="1100" b="1">
+                <a:solidFill>
+                  <a:srgbClr val="5B3E83"/>
+                </a:solidFill>
+                <a:latin typeface="Bricolage Grotesque"/>
+              </a:rPr>
+              <a:t>marco</a:t>
+            </a:r>
+          </a:p>
+          <a:p>
+            <a:pPr algn="l"/>
+            <a:r>
+              <a:rPr sz="1000">
+                <a:solidFill>
+                  <a:srgbClr val="20242E"/>
+                </a:solidFill>
+                <a:latin typeface="Inter"/>
+              </a:rPr>
+              <a:t>Pasando por el pasillo llegamos a …</a:t>
+            </a:r>
+          </a:p>
+        </p:txBody>
+      </p:sp>
+      <p:sp>
+        <p:nvSpPr>
+          <p:cNvPr id="25" name="Tarjeta 7"/>
+          <p:cNvSpPr/>
+          <p:nvPr/>
+        </p:nvSpPr>
+        <p:spPr>
+          <a:xfrm>
+            <a:off x="9022842" y="3968496"/>
+            <a:ext cx="2708910" cy="1170432"/>
+          </a:xfrm>
+          <a:prstGeom prst="roundRect">
+            <a:avLst>
+              <a:gd name="adj" fmla="val 6000"/>
+            </a:avLst>
+          </a:prstGeom>
+          <a:solidFill>
+            <a:srgbClr val="FFFFFF"/>
+          </a:solidFill>
+          <a:ln w="12700">
+            <a:solidFill>
+              <a:srgbClr val="E4E3DE"/>
+            </a:solidFill>
+          </a:ln>
+          <a:effectLst/>
+        </p:spPr>
+        <p:style>
+          <a:lnRef idx="1">
+            <a:schemeClr val="accent1"/>
+          </a:lnRef>
+          <a:fillRef idx="3">
+            <a:schemeClr val="accent1"/>
+          </a:fillRef>
+          <a:effectRef idx="2">
+            <a:schemeClr val="accent1"/>
+          </a:effectRef>
+          <a:fontRef idx="minor">
+            <a:schemeClr val="lt1"/>
+          </a:fontRef>
+        </p:style>
+        <p:txBody>
+          <a:bodyPr rtlCol="0" anchor="ctr"/>
+          <a:lstStyle/>
+          <a:p/>
+        </p:txBody>
+      </p:sp>
+      <p:sp>
+        <p:nvSpPr>
+          <p:cNvPr id="26" name="TarjetaTxt 7"/>
+          <p:cNvSpPr txBox="1"/>
+          <p:nvPr/>
+        </p:nvSpPr>
+        <p:spPr>
+          <a:xfrm>
+            <a:off x="9114282" y="4023360"/>
+            <a:ext cx="2526030" cy="1060704"/>
+          </a:xfrm>
+          <a:prstGeom prst="rect">
+            <a:avLst/>
+          </a:prstGeom>
+          <a:noFill/>
+        </p:spPr>
+        <p:txBody>
+          <a:bodyPr wrap="square" anchor="t" lIns="45720" rIns="45720" tIns="27432" bIns="27432">
+            <a:normAutofit/>
+          </a:bodyPr>
+          <a:lstStyle/>
+          <a:p>
+            <a:pPr algn="l"/>
+            <a:r>
+              <a:rPr sz="1100" b="1">
+                <a:solidFill>
+                  <a:srgbClr val="5B3E83"/>
+                </a:solidFill>
+                <a:latin typeface="Bricolage Grotesque"/>
+              </a:rPr>
+              <a:t>marco</a:t>
+            </a:r>
+          </a:p>
+          <a:p>
+            <a:pPr algn="l"/>
+            <a:r>
+              <a:rPr sz="1000">
+                <a:solidFill>
+                  <a:srgbClr val="20242E"/>
+                </a:solidFill>
+                <a:latin typeface="Inter"/>
+              </a:rPr>
+              <a:t>Entre … y … hay …</a:t>
+            </a:r>
+          </a:p>
+        </p:txBody>
+      </p:sp>
+      <p:sp>
+        <p:nvSpPr>
+          <p:cNvPr id="27" name="Tarjeta 8"/>
+          <p:cNvSpPr/>
+          <p:nvPr/>
+        </p:nvSpPr>
+        <p:spPr>
+          <a:xfrm>
+            <a:off x="457200" y="5266944"/>
+            <a:ext cx="2708910" cy="1170432"/>
+          </a:xfrm>
+          <a:prstGeom prst="roundRect">
+            <a:avLst>
+              <a:gd name="adj" fmla="val 6000"/>
+            </a:avLst>
+          </a:prstGeom>
+          <a:solidFill>
+            <a:srgbClr val="FFFFFF"/>
+          </a:solidFill>
+          <a:ln w="12700">
+            <a:solidFill>
+              <a:srgbClr val="E4E3DE"/>
+            </a:solidFill>
+          </a:ln>
+          <a:effectLst/>
+        </p:spPr>
+        <p:style>
+          <a:lnRef idx="1">
+            <a:schemeClr val="accent1"/>
+          </a:lnRef>
+          <a:fillRef idx="3">
+            <a:schemeClr val="accent1"/>
+          </a:fillRef>
+          <a:effectRef idx="2">
+            <a:schemeClr val="accent1"/>
+          </a:effectRef>
+          <a:fontRef idx="minor">
+            <a:schemeClr val="lt1"/>
+          </a:fontRef>
+        </p:style>
+        <p:txBody>
+          <a:bodyPr rtlCol="0" anchor="ctr"/>
+          <a:lstStyle/>
+          <a:p/>
+        </p:txBody>
+      </p:sp>
+      <p:sp>
+        <p:nvSpPr>
+          <p:cNvPr id="28" name="TarjetaTxt 8"/>
+          <p:cNvSpPr txBox="1"/>
+          <p:nvPr/>
+        </p:nvSpPr>
+        <p:spPr>
+          <a:xfrm>
+            <a:off x="548640" y="5321808"/>
+            <a:ext cx="2526030" cy="1060704"/>
+          </a:xfrm>
+          <a:prstGeom prst="rect">
+            <a:avLst/>
+          </a:prstGeom>
+          <a:noFill/>
+        </p:spPr>
+        <p:txBody>
+          <a:bodyPr wrap="square" anchor="t" lIns="45720" rIns="45720" tIns="27432" bIns="27432">
+            <a:normAutofit/>
+          </a:bodyPr>
+          <a:lstStyle/>
+          <a:p>
+            <a:pPr algn="l"/>
+            <a:r>
+              <a:rPr sz="1100" b="1">
+                <a:solidFill>
+                  <a:srgbClr val="5B3E83"/>
+                </a:solidFill>
+                <a:latin typeface="Bricolage Grotesque"/>
+              </a:rPr>
+              <a:t>marco</a:t>
+            </a:r>
+          </a:p>
+          <a:p>
+            <a:pPr algn="l"/>
+            <a:r>
+              <a:rPr sz="1000">
+                <a:solidFill>
+                  <a:srgbClr val="20242E"/>
+                </a:solidFill>
+                <a:latin typeface="Inter"/>
+              </a:rPr>
+              <a:t>Y al final, saliendo a …, se ve …</a:t>
             </a:r>
           </a:p>
         </p:txBody>
